--- a/스크립트언어/숙제5. 이진탐색 알고리즘.pptx
+++ b/스크립트언어/숙제5. 이진탐색 알고리즘.pptx
@@ -5,7 +5,7 @@
     <p:sldMasterId id="2147483684" r:id="rId1"/>
   </p:sldMasterIdLst>
   <p:notesMasterIdLst>
-    <p:notesMasterId r:id="rId12"/>
+    <p:notesMasterId r:id="rId14"/>
   </p:notesMasterIdLst>
   <p:sldIdLst>
     <p:sldId id="258" r:id="rId2"/>
@@ -18,6 +18,8 @@
     <p:sldId id="341" r:id="rId9"/>
     <p:sldId id="342" r:id="rId10"/>
     <p:sldId id="343" r:id="rId11"/>
+    <p:sldId id="344" r:id="rId12"/>
+    <p:sldId id="345" r:id="rId13"/>
   </p:sldIdLst>
   <p:sldSz cx="9144000" cy="6858000" type="screen4x3"/>
   <p:notesSz cx="6796088" cy="9926638"/>
@@ -277,7 +279,7 @@
               <a:pPr>
                 <a:defRPr/>
               </a:pPr>
-              <a:t>2026-03-01</a:t>
+              <a:t>2026-04-27</a:t>
             </a:fld>
             <a:endParaRPr lang="ko-KR" altLang="en-US"/>
           </a:p>
@@ -977,6 +979,210 @@
     <p:extLst>
       <p:ext uri="{BB962C8B-B14F-4D97-AF65-F5344CB8AC3E}">
         <p14:creationId xmlns:p14="http://schemas.microsoft.com/office/powerpoint/2010/main" val="1957181314"/>
+      </p:ext>
+    </p:extLst>
+  </p:cSld>
+  <p:clrMapOvr>
+    <a:masterClrMapping/>
+  </p:clrMapOvr>
+</p:notes>
+</file>
+
+<file path=ppt/notesSlides/notesSlide11.xml><?xml version="1.0" encoding="utf-8"?>
+<p:notes xmlns:a="http://schemas.openxmlformats.org/drawingml/2006/main" xmlns:r="http://schemas.openxmlformats.org/officeDocument/2006/relationships" xmlns:p="http://schemas.openxmlformats.org/presentationml/2006/main">
+  <p:cSld>
+    <p:spTree>
+      <p:nvGrpSpPr>
+        <p:cNvPr id="1" name=""/>
+        <p:cNvGrpSpPr/>
+        <p:nvPr/>
+      </p:nvGrpSpPr>
+      <p:grpSpPr>
+        <a:xfrm>
+          <a:off x="0" y="0"/>
+          <a:ext cx="0" cy="0"/>
+          <a:chOff x="0" y="0"/>
+          <a:chExt cx="0" cy="0"/>
+        </a:xfrm>
+      </p:grpSpPr>
+      <p:sp>
+        <p:nvSpPr>
+          <p:cNvPr id="2" name="슬라이드 이미지 개체 틀 1"/>
+          <p:cNvSpPr>
+            <a:spLocks noGrp="1" noRot="1" noChangeAspect="1"/>
+          </p:cNvSpPr>
+          <p:nvPr>
+            <p:ph type="sldImg"/>
+          </p:nvPr>
+        </p:nvSpPr>
+        <p:spPr/>
+      </p:sp>
+      <p:sp>
+        <p:nvSpPr>
+          <p:cNvPr id="3" name="슬라이드 노트 개체 틀 2"/>
+          <p:cNvSpPr>
+            <a:spLocks noGrp="1"/>
+          </p:cNvSpPr>
+          <p:nvPr>
+            <p:ph type="body" idx="1"/>
+          </p:nvPr>
+        </p:nvSpPr>
+        <p:spPr/>
+        <p:txBody>
+          <a:bodyPr/>
+          <a:lstStyle/>
+          <a:p>
+            <a:endParaRPr lang="ko-KR" altLang="en-US"/>
+          </a:p>
+        </p:txBody>
+      </p:sp>
+      <p:sp>
+        <p:nvSpPr>
+          <p:cNvPr id="4" name="슬라이드 번호 개체 틀 3"/>
+          <p:cNvSpPr>
+            <a:spLocks noGrp="1"/>
+          </p:cNvSpPr>
+          <p:nvPr>
+            <p:ph type="sldNum" sz="quarter" idx="10"/>
+          </p:nvPr>
+        </p:nvSpPr>
+        <p:spPr/>
+        <p:txBody>
+          <a:bodyPr/>
+          <a:lstStyle/>
+          <a:p>
+            <a:pPr>
+              <a:defRPr/>
+            </a:pPr>
+            <a:fld id="{F8CEB46D-9B0E-47D1-8684-1DB50B81E07A}" type="slidenum">
+              <a:rPr lang="ko-KR" altLang="en-US" smtClean="0"/>
+              <a:pPr>
+                <a:defRPr/>
+              </a:pPr>
+              <a:t>11</a:t>
+            </a:fld>
+            <a:endParaRPr lang="ko-KR" altLang="en-US"/>
+          </a:p>
+        </p:txBody>
+      </p:sp>
+    </p:spTree>
+    <p:extLst>
+      <p:ext uri="{BB962C8B-B14F-4D97-AF65-F5344CB8AC3E}">
+        <p14:creationId xmlns:p14="http://schemas.microsoft.com/office/powerpoint/2010/main" val="1230207811"/>
+      </p:ext>
+    </p:extLst>
+  </p:cSld>
+  <p:clrMapOvr>
+    <a:masterClrMapping/>
+  </p:clrMapOvr>
+</p:notes>
+</file>
+
+<file path=ppt/notesSlides/notesSlide12.xml><?xml version="1.0" encoding="utf-8"?>
+<p:notes xmlns:a="http://schemas.openxmlformats.org/drawingml/2006/main" xmlns:r="http://schemas.openxmlformats.org/officeDocument/2006/relationships" xmlns:p="http://schemas.openxmlformats.org/presentationml/2006/main">
+  <p:cSld>
+    <p:spTree>
+      <p:nvGrpSpPr>
+        <p:cNvPr id="1" name="">
+          <a:extLst>
+            <a:ext uri="{FF2B5EF4-FFF2-40B4-BE49-F238E27FC236}">
+              <a16:creationId xmlns:a16="http://schemas.microsoft.com/office/drawing/2014/main" id="{C248637D-675F-5E32-690D-2281BE8B8157}"/>
+            </a:ext>
+          </a:extLst>
+        </p:cNvPr>
+        <p:cNvGrpSpPr/>
+        <p:nvPr/>
+      </p:nvGrpSpPr>
+      <p:grpSpPr>
+        <a:xfrm>
+          <a:off x="0" y="0"/>
+          <a:ext cx="0" cy="0"/>
+          <a:chOff x="0" y="0"/>
+          <a:chExt cx="0" cy="0"/>
+        </a:xfrm>
+      </p:grpSpPr>
+      <p:sp>
+        <p:nvSpPr>
+          <p:cNvPr id="2" name="슬라이드 이미지 개체 틀 1">
+            <a:extLst>
+              <a:ext uri="{FF2B5EF4-FFF2-40B4-BE49-F238E27FC236}">
+                <a16:creationId xmlns:a16="http://schemas.microsoft.com/office/drawing/2014/main" id="{42C354D7-5F9A-CAAF-D089-3BD4E3E507A9}"/>
+              </a:ext>
+            </a:extLst>
+          </p:cNvPr>
+          <p:cNvSpPr>
+            <a:spLocks noGrp="1" noRot="1" noChangeAspect="1"/>
+          </p:cNvSpPr>
+          <p:nvPr>
+            <p:ph type="sldImg"/>
+          </p:nvPr>
+        </p:nvSpPr>
+        <p:spPr/>
+      </p:sp>
+      <p:sp>
+        <p:nvSpPr>
+          <p:cNvPr id="3" name="슬라이드 노트 개체 틀 2">
+            <a:extLst>
+              <a:ext uri="{FF2B5EF4-FFF2-40B4-BE49-F238E27FC236}">
+                <a16:creationId xmlns:a16="http://schemas.microsoft.com/office/drawing/2014/main" id="{0748C64C-D027-757A-464D-693B0467B3AC}"/>
+              </a:ext>
+            </a:extLst>
+          </p:cNvPr>
+          <p:cNvSpPr>
+            <a:spLocks noGrp="1"/>
+          </p:cNvSpPr>
+          <p:nvPr>
+            <p:ph type="body" idx="1"/>
+          </p:nvPr>
+        </p:nvSpPr>
+        <p:spPr/>
+        <p:txBody>
+          <a:bodyPr/>
+          <a:lstStyle/>
+          <a:p>
+            <a:endParaRPr lang="ko-KR" altLang="en-US"/>
+          </a:p>
+        </p:txBody>
+      </p:sp>
+      <p:sp>
+        <p:nvSpPr>
+          <p:cNvPr id="4" name="슬라이드 번호 개체 틀 3">
+            <a:extLst>
+              <a:ext uri="{FF2B5EF4-FFF2-40B4-BE49-F238E27FC236}">
+                <a16:creationId xmlns:a16="http://schemas.microsoft.com/office/drawing/2014/main" id="{2D2D41C9-60F7-A235-5B84-DBC200EF3F4B}"/>
+              </a:ext>
+            </a:extLst>
+          </p:cNvPr>
+          <p:cNvSpPr>
+            <a:spLocks noGrp="1"/>
+          </p:cNvSpPr>
+          <p:nvPr>
+            <p:ph type="sldNum" sz="quarter" idx="10"/>
+          </p:nvPr>
+        </p:nvSpPr>
+        <p:spPr/>
+        <p:txBody>
+          <a:bodyPr/>
+          <a:lstStyle/>
+          <a:p>
+            <a:pPr>
+              <a:defRPr/>
+            </a:pPr>
+            <a:fld id="{F8CEB46D-9B0E-47D1-8684-1DB50B81E07A}" type="slidenum">
+              <a:rPr lang="ko-KR" altLang="en-US" smtClean="0"/>
+              <a:pPr>
+                <a:defRPr/>
+              </a:pPr>
+              <a:t>12</a:t>
+            </a:fld>
+            <a:endParaRPr lang="ko-KR" altLang="en-US"/>
+          </a:p>
+        </p:txBody>
+      </p:sp>
+    </p:spTree>
+    <p:extLst>
+      <p:ext uri="{BB962C8B-B14F-4D97-AF65-F5344CB8AC3E}">
+        <p14:creationId xmlns:p14="http://schemas.microsoft.com/office/powerpoint/2010/main" val="2067109125"/>
       </p:ext>
     </p:extLst>
   </p:cSld>
@@ -7019,6 +7225,14 @@
               <a:t>(</a:t>
             </a:r>
             <a:r>
+              <a:rPr lang="en-US" altLang="ko-KR" sz="3200" dirty="0" err="1"/>
+              <a:t>TUKorea</a:t>
+            </a:r>
+            <a:r>
+              <a:rPr lang="en-US" altLang="ko-KR" sz="3200" dirty="0"/>
+              <a:t>, </a:t>
+            </a:r>
+            <a:r>
               <a:rPr lang="ko-KR" altLang="en-US" sz="3200" dirty="0"/>
               <a:t>백준</a:t>
             </a:r>
@@ -7036,6 +7250,21 @@
             </a:r>
             <a:br>
               <a:rPr lang="en-US" altLang="ko-KR" sz="3200" dirty="0"/>
+            </a:br>
+            <a:r>
+              <a:rPr lang="en-US" altLang="ko-KR" sz="2000" dirty="0">
+                <a:solidFill>
+                  <a:srgbClr val="0000FF"/>
+                </a:solidFill>
+              </a:rPr>
+              <a:t>http://210.93.60.51/problem/0180</a:t>
+            </a:r>
+            <a:br>
+              <a:rPr lang="en-US" altLang="ko-KR" sz="2000" dirty="0">
+                <a:solidFill>
+                  <a:srgbClr val="0000FF"/>
+                </a:solidFill>
+              </a:rPr>
             </a:br>
             <a:r>
               <a:rPr lang="en-US" altLang="ko-KR" sz="2000" dirty="0">
@@ -7321,6 +7550,768 @@
     <p:extLst>
       <p:ext uri="{BB962C8B-B14F-4D97-AF65-F5344CB8AC3E}">
         <p14:creationId xmlns:p14="http://schemas.microsoft.com/office/powerpoint/2010/main" val="2750110052"/>
+      </p:ext>
+    </p:extLst>
+  </p:cSld>
+  <p:clrMapOvr>
+    <a:masterClrMapping/>
+  </p:clrMapOvr>
+</p:sld>
+</file>
+
+<file path=ppt/slides/slide11.xml><?xml version="1.0" encoding="utf-8"?>
+<p:sld xmlns:a="http://schemas.openxmlformats.org/drawingml/2006/main" xmlns:r="http://schemas.openxmlformats.org/officeDocument/2006/relationships" xmlns:p="http://schemas.openxmlformats.org/presentationml/2006/main">
+  <p:cSld>
+    <p:spTree>
+      <p:nvGrpSpPr>
+        <p:cNvPr id="1" name=""/>
+        <p:cNvGrpSpPr/>
+        <p:nvPr/>
+      </p:nvGrpSpPr>
+      <p:grpSpPr>
+        <a:xfrm>
+          <a:off x="0" y="0"/>
+          <a:ext cx="0" cy="0"/>
+          <a:chOff x="0" y="0"/>
+          <a:chExt cx="0" cy="0"/>
+        </a:xfrm>
+      </p:grpSpPr>
+      <p:sp>
+        <p:nvSpPr>
+          <p:cNvPr id="2" name="제목 1"/>
+          <p:cNvSpPr>
+            <a:spLocks noGrp="1"/>
+          </p:cNvSpPr>
+          <p:nvPr>
+            <p:ph type="title"/>
+          </p:nvPr>
+        </p:nvSpPr>
+        <p:spPr/>
+        <p:txBody>
+          <a:bodyPr/>
+          <a:lstStyle/>
+          <a:p>
+            <a:r>
+              <a:rPr lang="en-US" altLang="ko-KR" sz="2800" dirty="0">
+                <a:ea typeface="맑은 고딕"/>
+              </a:rPr>
+              <a:t>6. </a:t>
+            </a:r>
+            <a:r>
+              <a:rPr lang="ko-KR" altLang="en-US" sz="2800" dirty="0">
+                <a:ea typeface="맑은 고딕"/>
+              </a:rPr>
+              <a:t>공유기 설치 </a:t>
+            </a:r>
+            <a:r>
+              <a:rPr lang="en-US" altLang="ko-KR" sz="2800" dirty="0">
+                <a:ea typeface="맑은 고딕"/>
+              </a:rPr>
+              <a:t>(</a:t>
+            </a:r>
+            <a:r>
+              <a:rPr lang="ko-KR" altLang="en-US" sz="2800" dirty="0">
+                <a:ea typeface="맑은 고딕"/>
+              </a:rPr>
+              <a:t>이분탐색</a:t>
+            </a:r>
+            <a:r>
+              <a:rPr lang="en-US" altLang="ko-KR" sz="2800" dirty="0">
+                <a:ea typeface="맑은 고딕"/>
+              </a:rPr>
+              <a:t>)</a:t>
+            </a:r>
+            <a:br>
+              <a:rPr lang="en-US" altLang="ko-KR" sz="2800" dirty="0"/>
+            </a:br>
+            <a:r>
+              <a:rPr lang="en-US" altLang="ko-KR" sz="2000" dirty="0">
+                <a:solidFill>
+                  <a:srgbClr val="0000FF"/>
+                </a:solidFill>
+                <a:ea typeface="맑은 고딕"/>
+              </a:rPr>
+              <a:t>http://210.93.60.51/problem/0259</a:t>
+            </a:r>
+            <a:br>
+              <a:rPr lang="en-US" altLang="ko-KR" sz="2000" dirty="0">
+                <a:solidFill>
+                  <a:srgbClr val="0000FF"/>
+                </a:solidFill>
+                <a:ea typeface="맑은 고딕"/>
+              </a:rPr>
+            </a:br>
+            <a:r>
+              <a:rPr lang="en-US" altLang="ko-KR" sz="2000" dirty="0">
+                <a:solidFill>
+                  <a:srgbClr val="0000FF"/>
+                </a:solidFill>
+                <a:ea typeface="맑은 고딕"/>
+              </a:rPr>
+              <a:t>https://www.acmicpc.net/problem/2110</a:t>
+            </a:r>
+          </a:p>
+        </p:txBody>
+      </p:sp>
+      <p:sp>
+        <p:nvSpPr>
+          <p:cNvPr id="3" name="내용 개체 틀 2"/>
+          <p:cNvSpPr>
+            <a:spLocks noGrp="1"/>
+          </p:cNvSpPr>
+          <p:nvPr>
+            <p:ph idx="1"/>
+          </p:nvPr>
+        </p:nvSpPr>
+        <p:spPr>
+          <a:xfrm>
+            <a:off x="457200" y="1340768"/>
+            <a:ext cx="8363272" cy="4785395"/>
+          </a:xfrm>
+        </p:spPr>
+        <p:txBody>
+          <a:bodyPr/>
+          <a:lstStyle/>
+          <a:p>
+            <a:r>
+              <a:rPr lang="ko-KR" altLang="en-US" sz="2000" dirty="0"/>
+              <a:t>집 </a:t>
+            </a:r>
+            <a:r>
+              <a:rPr lang="en-US" altLang="ko-KR" sz="2000" dirty="0"/>
+              <a:t>N</a:t>
+            </a:r>
+            <a:r>
+              <a:rPr lang="ko-KR" altLang="en-US" sz="2000" dirty="0"/>
+              <a:t>개가 수직선 위에 있다</a:t>
+            </a:r>
+            <a:r>
+              <a:rPr lang="en-US" altLang="ko-KR" sz="2000" dirty="0"/>
+              <a:t>. </a:t>
+            </a:r>
+            <a:r>
+              <a:rPr lang="ko-KR" altLang="en-US" sz="2000" dirty="0"/>
+              <a:t>각각의 집의 좌표는 </a:t>
+            </a:r>
+            <a:r>
+              <a:rPr lang="en-US" altLang="ko-KR" sz="2000" dirty="0"/>
+              <a:t>x1, ..., </a:t>
+            </a:r>
+            <a:r>
+              <a:rPr lang="en-US" altLang="ko-KR" sz="2000" dirty="0" err="1"/>
+              <a:t>xN</a:t>
+            </a:r>
+            <a:r>
+              <a:rPr lang="ko-KR" altLang="en-US" sz="2000" dirty="0"/>
+              <a:t>이고</a:t>
+            </a:r>
+            <a:r>
+              <a:rPr lang="en-US" altLang="ko-KR" sz="2000" dirty="0"/>
+              <a:t>, </a:t>
+            </a:r>
+            <a:r>
+              <a:rPr lang="ko-KR" altLang="en-US" sz="2000" dirty="0"/>
+              <a:t>집 </a:t>
+            </a:r>
+            <a:r>
+              <a:rPr lang="ko-KR" altLang="en-US" sz="2000" dirty="0" err="1"/>
+              <a:t>여러개가</a:t>
+            </a:r>
+            <a:r>
+              <a:rPr lang="ko-KR" altLang="en-US" sz="2000" dirty="0"/>
+              <a:t> 같은 좌표를 가지는 일은 없다</a:t>
+            </a:r>
+            <a:r>
+              <a:rPr lang="en-US" altLang="ko-KR" sz="2000" dirty="0"/>
+              <a:t>.</a:t>
+            </a:r>
+          </a:p>
+          <a:p>
+            <a:endParaRPr lang="en-US" altLang="ko-KR" sz="2000" dirty="0"/>
+          </a:p>
+          <a:p>
+            <a:r>
+              <a:rPr lang="ko-KR" altLang="en-US" sz="2000" dirty="0"/>
+              <a:t>공유기 </a:t>
+            </a:r>
+            <a:r>
+              <a:rPr lang="en-US" altLang="ko-KR" sz="2000" dirty="0"/>
+              <a:t>C</a:t>
+            </a:r>
+            <a:r>
+              <a:rPr lang="ko-KR" altLang="en-US" sz="2000" dirty="0"/>
+              <a:t>개를 설치하려고 한다</a:t>
+            </a:r>
+            <a:r>
+              <a:rPr lang="en-US" altLang="ko-KR" sz="2000" dirty="0"/>
+              <a:t>. </a:t>
+            </a:r>
+            <a:r>
+              <a:rPr lang="ko-KR" altLang="en-US" sz="2000" dirty="0"/>
+              <a:t>한 집에는 공유기를 하나만 설치</a:t>
+            </a:r>
+            <a:r>
+              <a:rPr lang="en-US" altLang="ko-KR" sz="2000" dirty="0"/>
+              <a:t> </a:t>
+            </a:r>
+          </a:p>
+          <a:p>
+            <a:endParaRPr lang="en-US" altLang="ko-KR" sz="2000" dirty="0"/>
+          </a:p>
+          <a:p>
+            <a:r>
+              <a:rPr lang="en-US" altLang="ko-KR" sz="2000" b="1" dirty="0"/>
+              <a:t>C</a:t>
+            </a:r>
+            <a:r>
+              <a:rPr lang="ko-KR" altLang="en-US" sz="2000" b="1" dirty="0"/>
+              <a:t>개의 공유기를 </a:t>
+            </a:r>
+            <a:r>
+              <a:rPr lang="en-US" altLang="ko-KR" sz="2000" b="1" dirty="0"/>
+              <a:t>N</a:t>
+            </a:r>
+            <a:r>
+              <a:rPr lang="ko-KR" altLang="en-US" sz="2000" b="1" dirty="0"/>
+              <a:t>개의 집에 적당히 설치해서</a:t>
+            </a:r>
+            <a:r>
+              <a:rPr lang="en-US" altLang="ko-KR" sz="2000" b="1" dirty="0"/>
+              <a:t>, </a:t>
+            </a:r>
+            <a:r>
+              <a:rPr lang="ko-KR" altLang="en-US" sz="2000" b="1" dirty="0"/>
+              <a:t>가장 인접한 두 공유기 사이의 거리를 최대로 하는 프로그램을 작성하시오</a:t>
+            </a:r>
+            <a:r>
+              <a:rPr lang="en-US" altLang="ko-KR" sz="2000" b="1" dirty="0"/>
+              <a:t>.</a:t>
+            </a:r>
+          </a:p>
+          <a:p>
+            <a:endParaRPr lang="en-US" altLang="ko-KR" sz="2000" dirty="0"/>
+          </a:p>
+          <a:p>
+            <a:r>
+              <a:rPr lang="ko-KR" altLang="en-US" sz="2000" dirty="0"/>
+              <a:t>첫째 줄에 </a:t>
+            </a:r>
+            <a:r>
+              <a:rPr lang="ko-KR" altLang="en-US" sz="2000" b="1" dirty="0"/>
+              <a:t>집의 개수 </a:t>
+            </a:r>
+            <a:r>
+              <a:rPr lang="en-US" altLang="ko-KR" sz="2000" b="1" dirty="0"/>
+              <a:t>N (2 ≤ N ≤ 200,000)</a:t>
+            </a:r>
+            <a:r>
+              <a:rPr lang="ko-KR" altLang="en-US" sz="2000" dirty="0"/>
+              <a:t>과 </a:t>
+            </a:r>
+            <a:r>
+              <a:rPr lang="ko-KR" altLang="en-US" sz="2000" b="1" dirty="0"/>
+              <a:t>공유기의 개수 </a:t>
+            </a:r>
+            <a:r>
+              <a:rPr lang="en-US" altLang="ko-KR" sz="2000" b="1" dirty="0"/>
+              <a:t>C (2 ≤ C ≤ N)</a:t>
+            </a:r>
+            <a:r>
+              <a:rPr lang="ko-KR" altLang="en-US" sz="2000" dirty="0"/>
+              <a:t>이 하나 이상의 빈 칸을 사이에 두고 주어진다</a:t>
+            </a:r>
+            <a:r>
+              <a:rPr lang="en-US" altLang="ko-KR" sz="2000" dirty="0"/>
+              <a:t>. </a:t>
+            </a:r>
+          </a:p>
+          <a:p>
+            <a:r>
+              <a:rPr lang="ko-KR" altLang="en-US" sz="2000" dirty="0"/>
+              <a:t>둘째 줄부터 </a:t>
+            </a:r>
+            <a:r>
+              <a:rPr lang="en-US" altLang="ko-KR" sz="2000" dirty="0"/>
+              <a:t>N</a:t>
+            </a:r>
+            <a:r>
+              <a:rPr lang="ko-KR" altLang="en-US" sz="2000" dirty="0"/>
+              <a:t>개의 줄에는 </a:t>
+            </a:r>
+            <a:r>
+              <a:rPr lang="ko-KR" altLang="en-US" sz="2000" b="1" dirty="0"/>
+              <a:t>집의 좌표 </a:t>
+            </a:r>
+            <a:r>
+              <a:rPr lang="en-US" altLang="ko-KR" sz="2000" b="1" dirty="0"/>
+              <a:t>xi (0 ≤ xi ≤ 1,000,000,000)</a:t>
+            </a:r>
+          </a:p>
+          <a:p>
+            <a:endParaRPr lang="en-US" altLang="ko-KR" sz="2000" dirty="0"/>
+          </a:p>
+          <a:p>
+            <a:r>
+              <a:rPr lang="ko-KR" altLang="en-US" sz="2000" b="1" dirty="0">
+                <a:solidFill>
+                  <a:srgbClr val="FF0000"/>
+                </a:solidFill>
+              </a:rPr>
+              <a:t>공유기가 모든 집을 커버하는 하는 것 아님</a:t>
+            </a:r>
+            <a:endParaRPr lang="en-US" altLang="ko-KR" sz="2000" b="1" dirty="0">
+              <a:solidFill>
+                <a:srgbClr val="FF0000"/>
+              </a:solidFill>
+            </a:endParaRPr>
+          </a:p>
+          <a:p>
+            <a:r>
+              <a:rPr lang="en-US" altLang="ko-KR" sz="2000" b="1" dirty="0">
+                <a:solidFill>
+                  <a:srgbClr val="FF0000"/>
+                </a:solidFill>
+              </a:rPr>
+              <a:t>C</a:t>
+            </a:r>
+            <a:r>
+              <a:rPr lang="ko-KR" altLang="en-US" sz="2000" b="1" dirty="0">
+                <a:solidFill>
+                  <a:srgbClr val="FF0000"/>
+                </a:solidFill>
+              </a:rPr>
+              <a:t>개 공유기를 다 설치할 수 있는가</a:t>
+            </a:r>
+            <a:r>
+              <a:rPr lang="en-US" altLang="ko-KR" sz="2000" b="1" dirty="0">
+                <a:solidFill>
+                  <a:srgbClr val="FF0000"/>
+                </a:solidFill>
+              </a:rPr>
+              <a:t>?</a:t>
+            </a:r>
+          </a:p>
+        </p:txBody>
+      </p:sp>
+      <p:sp>
+        <p:nvSpPr>
+          <p:cNvPr id="5" name="슬라이드 번호 개체 틀 4">
+            <a:extLst>
+              <a:ext uri="{FF2B5EF4-FFF2-40B4-BE49-F238E27FC236}">
+                <a16:creationId xmlns:a16="http://schemas.microsoft.com/office/drawing/2014/main" id="{93415DAC-B125-B7C1-4D98-E7D689F9C728}"/>
+              </a:ext>
+            </a:extLst>
+          </p:cNvPr>
+          <p:cNvSpPr>
+            <a:spLocks noGrp="1"/>
+          </p:cNvSpPr>
+          <p:nvPr>
+            <p:ph type="sldNum" sz="quarter" idx="12"/>
+          </p:nvPr>
+        </p:nvSpPr>
+        <p:spPr/>
+        <p:txBody>
+          <a:bodyPr/>
+          <a:lstStyle/>
+          <a:p>
+            <a:pPr>
+              <a:defRPr/>
+            </a:pPr>
+            <a:fld id="{A268DA64-E15D-4814-A1DA-86D92D550423}" type="slidenum">
+              <a:rPr lang="ko-KR" altLang="en-US"/>
+              <a:pPr>
+                <a:defRPr/>
+              </a:pPr>
+              <a:t>11</a:t>
+            </a:fld>
+            <a:endParaRPr lang="ko-KR" altLang="en-US"/>
+          </a:p>
+        </p:txBody>
+      </p:sp>
+    </p:spTree>
+    <p:extLst>
+      <p:ext uri="{BB962C8B-B14F-4D97-AF65-F5344CB8AC3E}">
+        <p14:creationId xmlns:p14="http://schemas.microsoft.com/office/powerpoint/2010/main" val="1446457459"/>
+      </p:ext>
+    </p:extLst>
+  </p:cSld>
+  <p:clrMapOvr>
+    <a:masterClrMapping/>
+  </p:clrMapOvr>
+</p:sld>
+</file>
+
+<file path=ppt/slides/slide12.xml><?xml version="1.0" encoding="utf-8"?>
+<p:sld xmlns:a="http://schemas.openxmlformats.org/drawingml/2006/main" xmlns:r="http://schemas.openxmlformats.org/officeDocument/2006/relationships" xmlns:p="http://schemas.openxmlformats.org/presentationml/2006/main">
+  <p:cSld>
+    <p:spTree>
+      <p:nvGrpSpPr>
+        <p:cNvPr id="1" name="">
+          <a:extLst>
+            <a:ext uri="{FF2B5EF4-FFF2-40B4-BE49-F238E27FC236}">
+              <a16:creationId xmlns:a16="http://schemas.microsoft.com/office/drawing/2014/main" id="{D3D7F08C-91EF-051A-AB9F-2B47FC8203D7}"/>
+            </a:ext>
+          </a:extLst>
+        </p:cNvPr>
+        <p:cNvGrpSpPr/>
+        <p:nvPr/>
+      </p:nvGrpSpPr>
+      <p:grpSpPr>
+        <a:xfrm>
+          <a:off x="0" y="0"/>
+          <a:ext cx="0" cy="0"/>
+          <a:chOff x="0" y="0"/>
+          <a:chExt cx="0" cy="0"/>
+        </a:xfrm>
+      </p:grpSpPr>
+      <p:sp>
+        <p:nvSpPr>
+          <p:cNvPr id="2" name="제목 1">
+            <a:extLst>
+              <a:ext uri="{FF2B5EF4-FFF2-40B4-BE49-F238E27FC236}">
+                <a16:creationId xmlns:a16="http://schemas.microsoft.com/office/drawing/2014/main" id="{B5F9F781-F201-C003-C8C9-534B815D146E}"/>
+              </a:ext>
+            </a:extLst>
+          </p:cNvPr>
+          <p:cNvSpPr>
+            <a:spLocks noGrp="1"/>
+          </p:cNvSpPr>
+          <p:nvPr>
+            <p:ph type="title"/>
+          </p:nvPr>
+        </p:nvSpPr>
+        <p:spPr/>
+        <p:txBody>
+          <a:bodyPr/>
+          <a:lstStyle/>
+          <a:p>
+            <a:r>
+              <a:rPr lang="en-US" altLang="ko-KR" sz="2800" dirty="0">
+                <a:ea typeface="맑은 고딕"/>
+              </a:rPr>
+              <a:t>7. </a:t>
+            </a:r>
+            <a:r>
+              <a:rPr lang="ko-KR" altLang="en-US" sz="2800" dirty="0">
+                <a:ea typeface="맑은 고딕"/>
+              </a:rPr>
+              <a:t>예산 </a:t>
+            </a:r>
+            <a:r>
+              <a:rPr lang="en-US" altLang="ko-KR" sz="2800" dirty="0">
+                <a:ea typeface="맑은 고딕"/>
+              </a:rPr>
+              <a:t>(</a:t>
+            </a:r>
+            <a:r>
+              <a:rPr lang="ko-KR" altLang="en-US" sz="2800" dirty="0">
+                <a:ea typeface="맑은 고딕"/>
+              </a:rPr>
+              <a:t>이분탐색</a:t>
+            </a:r>
+            <a:r>
+              <a:rPr lang="en-US" altLang="ko-KR" sz="2800" dirty="0">
+                <a:ea typeface="맑은 고딕"/>
+              </a:rPr>
+              <a:t>)</a:t>
+            </a:r>
+            <a:br>
+              <a:rPr lang="en-US" altLang="ko-KR" sz="2800" dirty="0"/>
+            </a:br>
+            <a:r>
+              <a:rPr lang="en-US" altLang="ko-KR" sz="2000" dirty="0">
+                <a:solidFill>
+                  <a:srgbClr val="0000FF"/>
+                </a:solidFill>
+                <a:ea typeface="맑은 고딕"/>
+              </a:rPr>
+              <a:t>http://210.93.60.51/problem/0260</a:t>
+            </a:r>
+            <a:br>
+              <a:rPr lang="en-US" altLang="ko-KR" sz="2000" dirty="0">
+                <a:solidFill>
+                  <a:srgbClr val="0000FF"/>
+                </a:solidFill>
+                <a:ea typeface="맑은 고딕"/>
+              </a:rPr>
+            </a:br>
+            <a:r>
+              <a:rPr lang="en-US" altLang="ko-KR" sz="2000" dirty="0">
+                <a:solidFill>
+                  <a:srgbClr val="0000FF"/>
+                </a:solidFill>
+                <a:ea typeface="맑은 고딕"/>
+              </a:rPr>
+              <a:t>https://www.acmicpc.net/problem/2512</a:t>
+            </a:r>
+          </a:p>
+        </p:txBody>
+      </p:sp>
+      <p:sp>
+        <p:nvSpPr>
+          <p:cNvPr id="3" name="내용 개체 틀 2">
+            <a:extLst>
+              <a:ext uri="{FF2B5EF4-FFF2-40B4-BE49-F238E27FC236}">
+                <a16:creationId xmlns:a16="http://schemas.microsoft.com/office/drawing/2014/main" id="{6716C5B9-5616-A340-2F5A-42443FFAA5A8}"/>
+              </a:ext>
+            </a:extLst>
+          </p:cNvPr>
+          <p:cNvSpPr>
+            <a:spLocks noGrp="1"/>
+          </p:cNvSpPr>
+          <p:nvPr>
+            <p:ph idx="1"/>
+          </p:nvPr>
+        </p:nvSpPr>
+        <p:spPr>
+          <a:xfrm>
+            <a:off x="457200" y="1340768"/>
+            <a:ext cx="8363272" cy="4785395"/>
+          </a:xfrm>
+        </p:spPr>
+        <p:txBody>
+          <a:bodyPr/>
+          <a:lstStyle/>
+          <a:p>
+            <a:r>
+              <a:rPr lang="ko-KR" altLang="en-US" sz="2000" dirty="0"/>
+              <a:t>정해진 총액 이하에서 가능한 한 </a:t>
+            </a:r>
+            <a:r>
+              <a:rPr lang="ko-KR" altLang="en-US" sz="2000" b="1" dirty="0"/>
+              <a:t>최대의 총 예산</a:t>
+            </a:r>
+            <a:r>
+              <a:rPr lang="ko-KR" altLang="en-US" sz="2000" dirty="0"/>
+              <a:t>을 다음과 같은 방법으로 배정한다</a:t>
+            </a:r>
+            <a:r>
+              <a:rPr lang="en-US" altLang="ko-KR" sz="2000" dirty="0"/>
+              <a:t>.</a:t>
+            </a:r>
+          </a:p>
+          <a:p>
+            <a:endParaRPr lang="en-US" altLang="ko-KR" sz="2000" dirty="0"/>
+          </a:p>
+          <a:p>
+            <a:r>
+              <a:rPr lang="ko-KR" altLang="en-US" sz="1800" dirty="0"/>
+              <a:t>모든 요청이 배정될 수 있는 경우에는 요청한 금액을 그대로 배정한다</a:t>
+            </a:r>
+            <a:r>
+              <a:rPr lang="en-US" altLang="ko-KR" sz="1800" dirty="0"/>
+              <a:t>.</a:t>
+            </a:r>
+          </a:p>
+          <a:p>
+            <a:r>
+              <a:rPr lang="ko-KR" altLang="en-US" sz="1800" dirty="0"/>
+              <a:t>모든 요청이 배정될 수 없는 경우에는 특정한 </a:t>
+            </a:r>
+            <a:r>
+              <a:rPr lang="ko-KR" altLang="en-US" sz="1800" b="1" dirty="0"/>
+              <a:t>정수 상한액</a:t>
+            </a:r>
+            <a:r>
+              <a:rPr lang="ko-KR" altLang="en-US" sz="1800" dirty="0"/>
+              <a:t>을 계산하여 그 이상인 예산요청에는 모두 상한액을 배정한다</a:t>
+            </a:r>
+            <a:r>
+              <a:rPr lang="en-US" altLang="ko-KR" sz="1800" dirty="0"/>
+              <a:t>. </a:t>
+            </a:r>
+            <a:r>
+              <a:rPr lang="ko-KR" altLang="en-US" sz="1800" dirty="0" err="1"/>
+              <a:t>상한액</a:t>
+            </a:r>
+            <a:r>
+              <a:rPr lang="ko-KR" altLang="en-US" sz="1800" dirty="0"/>
+              <a:t> 이하의 예산요청에 대해서는 요청한 금액을 그대로 배정한다</a:t>
+            </a:r>
+            <a:r>
+              <a:rPr lang="en-US" altLang="ko-KR" sz="1800" dirty="0"/>
+              <a:t>. </a:t>
+            </a:r>
+          </a:p>
+          <a:p>
+            <a:endParaRPr lang="en-US" altLang="ko-KR" sz="1800" b="1" dirty="0">
+              <a:solidFill>
+                <a:srgbClr val="FF0000"/>
+              </a:solidFill>
+            </a:endParaRPr>
+          </a:p>
+          <a:p>
+            <a:r>
+              <a:rPr lang="ko-KR" altLang="en-US" sz="2000" dirty="0"/>
+              <a:t>첫째 줄에는 지방의 수 </a:t>
+            </a:r>
+            <a:r>
+              <a:rPr lang="en-US" altLang="ko-KR" sz="2000" dirty="0"/>
+              <a:t>N</a:t>
+            </a:r>
+            <a:r>
+              <a:rPr lang="ko-KR" altLang="en-US" sz="2000" dirty="0"/>
+              <a:t>이 주어진다</a:t>
+            </a:r>
+            <a:r>
+              <a:rPr lang="en-US" altLang="ko-KR" sz="2000" dirty="0"/>
+              <a:t>. N</a:t>
+            </a:r>
+            <a:r>
+              <a:rPr lang="ko-KR" altLang="en-US" sz="2000" dirty="0"/>
+              <a:t>은 </a:t>
+            </a:r>
+            <a:r>
+              <a:rPr lang="en-US" altLang="ko-KR" sz="2000" dirty="0"/>
+              <a:t>3 </a:t>
+            </a:r>
+            <a:r>
+              <a:rPr lang="ko-KR" altLang="en-US" sz="2000" dirty="0"/>
+              <a:t>이상 </a:t>
+            </a:r>
+            <a:r>
+              <a:rPr lang="en-US" altLang="ko-KR" sz="2000" dirty="0"/>
+              <a:t>10,000 </a:t>
+            </a:r>
+            <a:r>
+              <a:rPr lang="ko-KR" altLang="en-US" sz="2000" dirty="0"/>
+              <a:t>이하이다</a:t>
+            </a:r>
+            <a:r>
+              <a:rPr lang="en-US" altLang="ko-KR" sz="2000" dirty="0"/>
+              <a:t>. </a:t>
+            </a:r>
+          </a:p>
+          <a:p>
+            <a:r>
+              <a:rPr lang="ko-KR" altLang="en-US" sz="2000" dirty="0"/>
+              <a:t>다음 줄에는 각 지방의 예산요청 </a:t>
+            </a:r>
+            <a:r>
+              <a:rPr lang="en-US" altLang="ko-KR" sz="2000" dirty="0"/>
+              <a:t>N</a:t>
+            </a:r>
+            <a:r>
+              <a:rPr lang="ko-KR" altLang="en-US" sz="2000" dirty="0"/>
+              <a:t>개의 정수 </a:t>
+            </a:r>
+            <a:r>
+              <a:rPr lang="en-US" altLang="ko-KR" sz="2000" dirty="0"/>
+              <a:t>1 </a:t>
+            </a:r>
+            <a:r>
+              <a:rPr lang="ko-KR" altLang="en-US" sz="2000" dirty="0"/>
+              <a:t>이상 </a:t>
+            </a:r>
+            <a:r>
+              <a:rPr lang="en-US" altLang="ko-KR" sz="2000" dirty="0"/>
+              <a:t>100,000 </a:t>
+            </a:r>
+            <a:r>
+              <a:rPr lang="ko-KR" altLang="en-US" sz="2000" dirty="0"/>
+              <a:t>이하</a:t>
+            </a:r>
+            <a:endParaRPr lang="en-US" altLang="ko-KR" sz="2000" dirty="0"/>
+          </a:p>
+          <a:p>
+            <a:r>
+              <a:rPr lang="ko-KR" altLang="en-US" sz="2000" dirty="0"/>
+              <a:t>그 다음 줄에는 총 예산 </a:t>
+            </a:r>
+            <a:r>
+              <a:rPr lang="en-US" altLang="ko-KR" sz="2000" dirty="0"/>
+              <a:t>M. M</a:t>
+            </a:r>
+            <a:r>
+              <a:rPr lang="ko-KR" altLang="en-US" sz="2000" dirty="0"/>
+              <a:t>은 </a:t>
+            </a:r>
+            <a:r>
+              <a:rPr lang="en-US" altLang="ko-KR" sz="2000" dirty="0"/>
+              <a:t>N </a:t>
+            </a:r>
+            <a:r>
+              <a:rPr lang="ko-KR" altLang="en-US" sz="2000" dirty="0"/>
+              <a:t>이상 </a:t>
+            </a:r>
+            <a:r>
+              <a:rPr lang="en-US" altLang="ko-KR" sz="2000" dirty="0"/>
+              <a:t>1,000,000,000 </a:t>
+            </a:r>
+            <a:r>
+              <a:rPr lang="ko-KR" altLang="en-US" sz="2000" dirty="0"/>
+              <a:t>이하이다</a:t>
+            </a:r>
+            <a:r>
+              <a:rPr lang="en-US" altLang="ko-KR" sz="2000" dirty="0"/>
+              <a:t>. </a:t>
+            </a:r>
+          </a:p>
+          <a:p>
+            <a:pPr marL="0" indent="0">
+              <a:buNone/>
+            </a:pPr>
+            <a:endParaRPr lang="ko-KR" altLang="en-US" sz="2000" dirty="0"/>
+          </a:p>
+          <a:p>
+            <a:r>
+              <a:rPr lang="ko-KR" altLang="en-US" sz="2000" dirty="0"/>
+              <a:t>첫째 줄에는 </a:t>
+            </a:r>
+            <a:r>
+              <a:rPr lang="ko-KR" altLang="en-US" sz="2000" b="1" dirty="0"/>
+              <a:t>배정된 예산들 중 최댓값인 정수를 출력</a:t>
+            </a:r>
+            <a:r>
+              <a:rPr lang="ko-KR" altLang="en-US" sz="2000" dirty="0"/>
+              <a:t>한다</a:t>
+            </a:r>
+            <a:r>
+              <a:rPr lang="en-US" altLang="ko-KR" sz="2000" dirty="0"/>
+              <a:t>. </a:t>
+            </a:r>
+          </a:p>
+        </p:txBody>
+      </p:sp>
+      <p:sp>
+        <p:nvSpPr>
+          <p:cNvPr id="5" name="슬라이드 번호 개체 틀 4">
+            <a:extLst>
+              <a:ext uri="{FF2B5EF4-FFF2-40B4-BE49-F238E27FC236}">
+                <a16:creationId xmlns:a16="http://schemas.microsoft.com/office/drawing/2014/main" id="{9FD788ED-87C1-E636-93CE-C6D5F6D187BB}"/>
+              </a:ext>
+            </a:extLst>
+          </p:cNvPr>
+          <p:cNvSpPr>
+            <a:spLocks noGrp="1"/>
+          </p:cNvSpPr>
+          <p:nvPr>
+            <p:ph type="sldNum" sz="quarter" idx="12"/>
+          </p:nvPr>
+        </p:nvSpPr>
+        <p:spPr/>
+        <p:txBody>
+          <a:bodyPr/>
+          <a:lstStyle/>
+          <a:p>
+            <a:pPr>
+              <a:defRPr/>
+            </a:pPr>
+            <a:fld id="{A268DA64-E15D-4814-A1DA-86D92D550423}" type="slidenum">
+              <a:rPr lang="ko-KR" altLang="en-US"/>
+              <a:pPr>
+                <a:defRPr/>
+              </a:pPr>
+              <a:t>12</a:t>
+            </a:fld>
+            <a:endParaRPr lang="ko-KR" altLang="en-US"/>
+          </a:p>
+        </p:txBody>
+      </p:sp>
+    </p:spTree>
+    <p:extLst>
+      <p:ext uri="{BB962C8B-B14F-4D97-AF65-F5344CB8AC3E}">
+        <p14:creationId xmlns:p14="http://schemas.microsoft.com/office/powerpoint/2010/main" val="516517271"/>
       </p:ext>
     </p:extLst>
   </p:cSld>
@@ -8767,8 +9758,8 @@
         </p:nvSpPr>
         <p:spPr>
           <a:xfrm>
-            <a:off x="457200" y="274638"/>
-            <a:ext cx="8229600" cy="1642194"/>
+            <a:off x="107504" y="274638"/>
+            <a:ext cx="8579296" cy="1642194"/>
           </a:xfrm>
         </p:spPr>
         <p:txBody>
@@ -8785,7 +9776,7 @@
             </a:r>
             <a:r>
               <a:rPr lang="en-US" altLang="ko-KR" sz="3200" dirty="0"/>
-              <a:t>(</a:t>
+              <a:t>(TUKorea0070,</a:t>
             </a:r>
             <a:r>
               <a:rPr lang="ko-KR" altLang="en-US" sz="3200" dirty="0"/>
@@ -8805,6 +9796,21 @@
             </a:r>
             <a:br>
               <a:rPr lang="en-US" altLang="ko-KR" sz="3200" dirty="0"/>
+            </a:br>
+            <a:r>
+              <a:rPr lang="en-US" altLang="ko-KR" sz="1600" dirty="0">
+                <a:solidFill>
+                  <a:srgbClr val="0000FF"/>
+                </a:solidFill>
+              </a:rPr>
+              <a:t>http://210.93.60.51/problem/0070</a:t>
+            </a:r>
+            <a:br>
+              <a:rPr lang="en-US" altLang="ko-KR" sz="1600" dirty="0">
+                <a:solidFill>
+                  <a:srgbClr val="0000FF"/>
+                </a:solidFill>
+              </a:rPr>
             </a:br>
             <a:r>
               <a:rPr lang="en-US" altLang="ko-KR" sz="1600" dirty="0">
@@ -9241,7 +10247,12 @@
             <p:ph type="title"/>
           </p:nvPr>
         </p:nvSpPr>
-        <p:spPr/>
+        <p:spPr>
+          <a:xfrm>
+            <a:off x="457200" y="274638"/>
+            <a:ext cx="8229600" cy="994122"/>
+          </a:xfrm>
+        </p:spPr>
         <p:txBody>
           <a:bodyPr/>
           <a:lstStyle/>
@@ -9257,6 +10268,14 @@
             <a:r>
               <a:rPr lang="en-US" altLang="ko-KR" sz="3200" dirty="0"/>
               <a:t>(</a:t>
+            </a:r>
+            <a:r>
+              <a:rPr lang="en-US" altLang="ko-KR" sz="3200" dirty="0" err="1"/>
+              <a:t>TUKorea</a:t>
+            </a:r>
+            <a:r>
+              <a:rPr lang="en-US" altLang="ko-KR" sz="3200" dirty="0"/>
+              <a:t>, </a:t>
             </a:r>
             <a:r>
               <a:rPr lang="ko-KR" altLang="en-US" sz="3200" dirty="0"/>
@@ -9278,7 +10297,26 @@
               <a:rPr lang="en-US" altLang="ko-KR" sz="3200" dirty="0"/>
             </a:br>
             <a:r>
-              <a:rPr lang="en-US" altLang="ko-KR" sz="3200" dirty="0"/>
+              <a:rPr lang="en-US" altLang="ko-KR" sz="2000" dirty="0">
+                <a:solidFill>
+                  <a:srgbClr val="0000FF"/>
+                </a:solidFill>
+              </a:rPr>
+              <a:t>http://210.93.60.51/problem/0181</a:t>
+            </a:r>
+            <a:br>
+              <a:rPr lang="en-US" altLang="ko-KR" sz="2000" dirty="0">
+                <a:solidFill>
+                  <a:srgbClr val="0000FF"/>
+                </a:solidFill>
+              </a:rPr>
+            </a:br>
+            <a:r>
+              <a:rPr lang="en-US" altLang="ko-KR" sz="2000" dirty="0">
+                <a:solidFill>
+                  <a:srgbClr val="0000FF"/>
+                </a:solidFill>
+              </a:rPr>
               <a:t>https://www.acmicpc.net/problem/13420</a:t>
             </a:r>
             <a:endParaRPr lang="ko-KR" altLang="en-US" sz="3200" dirty="0"/>

--- a/스크립트언어/숙제5. 이진탐색 알고리즘.pptx
+++ b/스크립트언어/숙제5. 이진탐색 알고리즘.pptx
@@ -5,7 +5,7 @@
     <p:sldMasterId id="2147483684" r:id="rId1"/>
   </p:sldMasterIdLst>
   <p:notesMasterIdLst>
-    <p:notesMasterId r:id="rId14"/>
+    <p:notesMasterId r:id="rId21"/>
   </p:notesMasterIdLst>
   <p:sldIdLst>
     <p:sldId id="258" r:id="rId2"/>
@@ -13,13 +13,20 @@
     <p:sldId id="335" r:id="rId4"/>
     <p:sldId id="259" r:id="rId5"/>
     <p:sldId id="336" r:id="rId6"/>
-    <p:sldId id="337" r:id="rId7"/>
-    <p:sldId id="339" r:id="rId8"/>
-    <p:sldId id="341" r:id="rId9"/>
-    <p:sldId id="342" r:id="rId10"/>
-    <p:sldId id="343" r:id="rId11"/>
-    <p:sldId id="344" r:id="rId12"/>
-    <p:sldId id="345" r:id="rId13"/>
+    <p:sldId id="346" r:id="rId7"/>
+    <p:sldId id="337" r:id="rId8"/>
+    <p:sldId id="347" r:id="rId9"/>
+    <p:sldId id="339" r:id="rId10"/>
+    <p:sldId id="348" r:id="rId11"/>
+    <p:sldId id="341" r:id="rId12"/>
+    <p:sldId id="342" r:id="rId13"/>
+    <p:sldId id="349" r:id="rId14"/>
+    <p:sldId id="343" r:id="rId15"/>
+    <p:sldId id="350" r:id="rId16"/>
+    <p:sldId id="344" r:id="rId17"/>
+    <p:sldId id="351" r:id="rId18"/>
+    <p:sldId id="345" r:id="rId19"/>
+    <p:sldId id="352" r:id="rId20"/>
   </p:sldIdLst>
   <p:sldSz cx="9144000" cy="6858000" type="screen4x3"/>
   <p:notesSz cx="6796088" cy="9926638"/>
@@ -279,7 +286,7 @@
               <a:pPr>
                 <a:defRPr/>
               </a:pPr>
-              <a:t>2026-04-27</a:t>
+              <a:t>2026-04-29</a:t>
             </a:fld>
             <a:endParaRPr lang="ko-KR" altLang="en-US"/>
           </a:p>
@@ -969,7 +976,7 @@
               <a:pPr>
                 <a:defRPr/>
               </a:pPr>
-              <a:t>10</a:t>
+              <a:t>14</a:t>
             </a:fld>
             <a:endParaRPr lang="ko-KR" altLang="en-US"/>
           </a:p>
@@ -1059,7 +1066,7 @@
               <a:pPr>
                 <a:defRPr/>
               </a:pPr>
-              <a:t>11</a:t>
+              <a:t>16</a:t>
             </a:fld>
             <a:endParaRPr lang="ko-KR" altLang="en-US"/>
           </a:p>
@@ -1173,7 +1180,7 @@
               <a:pPr>
                 <a:defRPr/>
               </a:pPr>
-              <a:t>12</a:t>
+              <a:t>18</a:t>
             </a:fld>
             <a:endParaRPr lang="ko-KR" altLang="en-US"/>
           </a:p>
@@ -2284,7 +2291,7 @@
               <a:pPr>
                 <a:defRPr/>
               </a:pPr>
-              <a:t>6</a:t>
+              <a:t>7</a:t>
             </a:fld>
             <a:endParaRPr lang="ko-KR" altLang="en-US"/>
           </a:p>
@@ -2398,7 +2405,7 @@
               <a:pPr>
                 <a:defRPr/>
               </a:pPr>
-              <a:t>7</a:t>
+              <a:t>9</a:t>
             </a:fld>
             <a:endParaRPr lang="ko-KR" altLang="en-US"/>
           </a:p>
@@ -2512,7 +2519,7 @@
               <a:pPr>
                 <a:defRPr/>
               </a:pPr>
-              <a:t>8</a:t>
+              <a:t>11</a:t>
             </a:fld>
             <a:endParaRPr lang="ko-KR" altLang="en-US"/>
           </a:p>
@@ -2626,7 +2633,7 @@
               <a:pPr>
                 <a:defRPr/>
               </a:pPr>
-              <a:t>9</a:t>
+              <a:t>12</a:t>
             </a:fld>
             <a:endParaRPr lang="ko-KR" altLang="en-US"/>
           </a:p>
@@ -7168,6 +7175,1334 @@
   <p:cSld>
     <p:spTree>
       <p:nvGrpSpPr>
+        <p:cNvPr id="1" name=""/>
+        <p:cNvGrpSpPr/>
+        <p:nvPr/>
+      </p:nvGrpSpPr>
+      <p:grpSpPr>
+        <a:xfrm>
+          <a:off x="0" y="0"/>
+          <a:ext cx="0" cy="0"/>
+          <a:chOff x="0" y="0"/>
+          <a:chExt cx="0" cy="0"/>
+        </a:xfrm>
+      </p:grpSpPr>
+      <p:sp>
+        <p:nvSpPr>
+          <p:cNvPr id="2" name="제목 1">
+            <a:extLst>
+              <a:ext uri="{FF2B5EF4-FFF2-40B4-BE49-F238E27FC236}">
+                <a16:creationId xmlns:a16="http://schemas.microsoft.com/office/drawing/2014/main" id="{3BFBED75-208C-57E7-8ACF-227A76676352}"/>
+              </a:ext>
+            </a:extLst>
+          </p:cNvPr>
+          <p:cNvSpPr>
+            <a:spLocks noGrp="1"/>
+          </p:cNvSpPr>
+          <p:nvPr>
+            <p:ph type="title"/>
+          </p:nvPr>
+        </p:nvSpPr>
+        <p:spPr/>
+        <p:txBody>
+          <a:bodyPr/>
+          <a:lstStyle/>
+          <a:p>
+            <a:endParaRPr lang="ko-KR" altLang="en-US"/>
+          </a:p>
+        </p:txBody>
+      </p:sp>
+      <p:pic>
+        <p:nvPicPr>
+          <p:cNvPr id="7" name="내용 개체 틀 6">
+            <a:extLst>
+              <a:ext uri="{FF2B5EF4-FFF2-40B4-BE49-F238E27FC236}">
+                <a16:creationId xmlns:a16="http://schemas.microsoft.com/office/drawing/2014/main" id="{AB9F9786-1DBB-B944-CD40-E6914B0EE71F}"/>
+              </a:ext>
+            </a:extLst>
+          </p:cNvPr>
+          <p:cNvPicPr>
+            <a:picLocks noGrp="1" noChangeAspect="1"/>
+          </p:cNvPicPr>
+          <p:nvPr>
+            <p:ph idx="1"/>
+          </p:nvPr>
+        </p:nvPicPr>
+        <p:blipFill>
+          <a:blip r:embed="rId2"/>
+          <a:stretch>
+            <a:fillRect/>
+          </a:stretch>
+        </p:blipFill>
+        <p:spPr bwMode="auto">
+          <a:xfrm>
+            <a:off x="539552" y="136525"/>
+            <a:ext cx="6336704" cy="2377903"/>
+          </a:xfrm>
+          <a:prstGeom prst="rect">
+            <a:avLst/>
+          </a:prstGeom>
+          <a:noFill/>
+          <a:ln>
+            <a:noFill/>
+          </a:ln>
+          <a:extLst>
+            <a:ext uri="{909E8E84-426E-40DD-AFC4-6F175D3DCCD1}">
+              <a14:hiddenFill xmlns:a14="http://schemas.microsoft.com/office/drawing/2010/main">
+                <a:solidFill>
+                  <a:srgbClr val="FFFFFF"/>
+                </a:solidFill>
+              </a14:hiddenFill>
+            </a:ext>
+            <a:ext uri="{91240B29-F687-4F45-9708-019B960494DF}">
+              <a14:hiddenLine xmlns:a14="http://schemas.microsoft.com/office/drawing/2010/main" w="9525">
+                <a:solidFill>
+                  <a:srgbClr val="000000"/>
+                </a:solidFill>
+                <a:miter lim="800000"/>
+                <a:headEnd/>
+                <a:tailEnd/>
+              </a14:hiddenLine>
+            </a:ext>
+          </a:extLst>
+        </p:spPr>
+      </p:pic>
+      <p:sp>
+        <p:nvSpPr>
+          <p:cNvPr id="4" name="날짜 개체 틀 3">
+            <a:extLst>
+              <a:ext uri="{FF2B5EF4-FFF2-40B4-BE49-F238E27FC236}">
+                <a16:creationId xmlns:a16="http://schemas.microsoft.com/office/drawing/2014/main" id="{7DD5AB2B-A330-A9E8-EBF1-E8EA50B85B7A}"/>
+              </a:ext>
+            </a:extLst>
+          </p:cNvPr>
+          <p:cNvSpPr>
+            <a:spLocks noGrp="1"/>
+          </p:cNvSpPr>
+          <p:nvPr>
+            <p:ph type="dt" sz="half" idx="10"/>
+          </p:nvPr>
+        </p:nvSpPr>
+        <p:spPr/>
+        <p:txBody>
+          <a:bodyPr/>
+          <a:lstStyle/>
+          <a:p>
+            <a:pPr>
+              <a:defRPr/>
+            </a:pPr>
+            <a:r>
+              <a:rPr lang="en-US" altLang="ko-KR"/>
+              <a:t>2008</a:t>
+            </a:r>
+            <a:r>
+              <a:rPr lang="ko-KR" altLang="en-US"/>
+              <a:t>년</a:t>
+            </a:r>
+            <a:r>
+              <a:rPr lang="en-US" altLang="ko-KR"/>
+              <a:t>2</a:t>
+            </a:r>
+            <a:r>
+              <a:rPr lang="ko-KR" altLang="en-US"/>
+              <a:t>학기 </a:t>
+            </a:r>
+            <a:r>
+              <a:rPr lang="en-US" altLang="ko-KR"/>
+              <a:t>3D</a:t>
+            </a:r>
+            <a:r>
+              <a:rPr lang="ko-KR" altLang="en-US"/>
+              <a:t>게임프로그래밍</a:t>
+            </a:r>
+            <a:r>
+              <a:rPr lang="en-US" altLang="ko-KR"/>
+              <a:t>II </a:t>
+            </a:r>
+            <a:r>
+              <a:rPr lang="ko-KR" altLang="en-US"/>
+              <a:t>담당교수</a:t>
+            </a:r>
+            <a:r>
+              <a:rPr lang="en-US" altLang="ko-KR"/>
+              <a:t>:</a:t>
+            </a:r>
+            <a:r>
+              <a:rPr lang="ko-KR" altLang="en-US"/>
+              <a:t>김영식</a:t>
+            </a:r>
+          </a:p>
+        </p:txBody>
+      </p:sp>
+      <p:sp>
+        <p:nvSpPr>
+          <p:cNvPr id="5" name="슬라이드 번호 개체 틀 4">
+            <a:extLst>
+              <a:ext uri="{FF2B5EF4-FFF2-40B4-BE49-F238E27FC236}">
+                <a16:creationId xmlns:a16="http://schemas.microsoft.com/office/drawing/2014/main" id="{2F1652B2-C685-92BB-6A67-EB5040495F57}"/>
+              </a:ext>
+            </a:extLst>
+          </p:cNvPr>
+          <p:cNvSpPr>
+            <a:spLocks noGrp="1"/>
+          </p:cNvSpPr>
+          <p:nvPr>
+            <p:ph type="sldNum" sz="quarter" idx="12"/>
+          </p:nvPr>
+        </p:nvSpPr>
+        <p:spPr/>
+        <p:txBody>
+          <a:bodyPr/>
+          <a:lstStyle/>
+          <a:p>
+            <a:pPr>
+              <a:defRPr/>
+            </a:pPr>
+            <a:fld id="{A268DA64-E15D-4814-A1DA-86D92D550423}" type="slidenum">
+              <a:rPr lang="ko-KR" altLang="en-US" smtClean="0"/>
+              <a:pPr>
+                <a:defRPr/>
+              </a:pPr>
+              <a:t>10</a:t>
+            </a:fld>
+            <a:endParaRPr lang="ko-KR" altLang="en-US"/>
+          </a:p>
+        </p:txBody>
+      </p:sp>
+      <p:pic>
+        <p:nvPicPr>
+          <p:cNvPr id="9" name="그림 8">
+            <a:extLst>
+              <a:ext uri="{FF2B5EF4-FFF2-40B4-BE49-F238E27FC236}">
+                <a16:creationId xmlns:a16="http://schemas.microsoft.com/office/drawing/2014/main" id="{0AE61E85-3E4B-6CB3-3410-2C8A2B9FED9F}"/>
+              </a:ext>
+            </a:extLst>
+          </p:cNvPr>
+          <p:cNvPicPr>
+            <a:picLocks noChangeAspect="1"/>
+          </p:cNvPicPr>
+          <p:nvPr/>
+        </p:nvPicPr>
+        <p:blipFill>
+          <a:blip r:embed="rId3"/>
+          <a:stretch>
+            <a:fillRect/>
+          </a:stretch>
+        </p:blipFill>
+        <p:spPr>
+          <a:xfrm>
+            <a:off x="5292080" y="1376705"/>
+            <a:ext cx="3498034" cy="4817323"/>
+          </a:xfrm>
+          <a:prstGeom prst="rect">
+            <a:avLst/>
+          </a:prstGeom>
+        </p:spPr>
+      </p:pic>
+    </p:spTree>
+    <p:extLst>
+      <p:ext uri="{BB962C8B-B14F-4D97-AF65-F5344CB8AC3E}">
+        <p14:creationId xmlns:p14="http://schemas.microsoft.com/office/powerpoint/2010/main" val="2495563823"/>
+      </p:ext>
+    </p:extLst>
+  </p:cSld>
+  <p:clrMapOvr>
+    <a:masterClrMapping/>
+  </p:clrMapOvr>
+</p:sld>
+</file>
+
+<file path=ppt/slides/slide11.xml><?xml version="1.0" encoding="utf-8"?>
+<p:sld xmlns:a="http://schemas.openxmlformats.org/drawingml/2006/main" xmlns:r="http://schemas.openxmlformats.org/officeDocument/2006/relationships" xmlns:p="http://schemas.openxmlformats.org/presentationml/2006/main">
+  <p:cSld>
+    <p:spTree>
+      <p:nvGrpSpPr>
+        <p:cNvPr id="1" name="">
+          <a:extLst>
+            <a:ext uri="{FF2B5EF4-FFF2-40B4-BE49-F238E27FC236}">
+              <a16:creationId xmlns:a16="http://schemas.microsoft.com/office/drawing/2014/main" id="{BB2182D6-7C3A-1450-0957-0736228992F8}"/>
+            </a:ext>
+          </a:extLst>
+        </p:cNvPr>
+        <p:cNvGrpSpPr/>
+        <p:nvPr/>
+      </p:nvGrpSpPr>
+      <p:grpSpPr>
+        <a:xfrm>
+          <a:off x="0" y="0"/>
+          <a:ext cx="0" cy="0"/>
+          <a:chOff x="0" y="0"/>
+          <a:chExt cx="0" cy="0"/>
+        </a:xfrm>
+      </p:grpSpPr>
+      <p:sp>
+        <p:nvSpPr>
+          <p:cNvPr id="2" name="제목 1">
+            <a:extLst>
+              <a:ext uri="{FF2B5EF4-FFF2-40B4-BE49-F238E27FC236}">
+                <a16:creationId xmlns:a16="http://schemas.microsoft.com/office/drawing/2014/main" id="{00FC0AAC-B616-D4EC-909C-ECC3F2A8B843}"/>
+              </a:ext>
+            </a:extLst>
+          </p:cNvPr>
+          <p:cNvSpPr>
+            <a:spLocks noGrp="1"/>
+          </p:cNvSpPr>
+          <p:nvPr>
+            <p:ph type="title"/>
+          </p:nvPr>
+        </p:nvSpPr>
+        <p:spPr/>
+        <p:txBody>
+          <a:bodyPr/>
+          <a:lstStyle/>
+          <a:p>
+            <a:r>
+              <a:rPr lang="en-US" altLang="ko-KR" sz="2800" dirty="0"/>
+              <a:t>4. </a:t>
+            </a:r>
+            <a:r>
+              <a:rPr lang="ko-KR" altLang="en-US" sz="2800" dirty="0"/>
+              <a:t>비밀지도</a:t>
+            </a:r>
+            <a:r>
+              <a:rPr lang="en-US" altLang="ko-KR" sz="2800" dirty="0"/>
+              <a:t>(Programmers, </a:t>
+            </a:r>
+            <a:r>
+              <a:rPr lang="ko-KR" altLang="en-US" sz="2800" dirty="0"/>
+              <a:t>구현</a:t>
+            </a:r>
+            <a:r>
+              <a:rPr lang="en-US" altLang="ko-KR" sz="2800" dirty="0"/>
+              <a:t>) </a:t>
+            </a:r>
+            <a:br>
+              <a:rPr lang="en-US" altLang="ko-KR" sz="2800" dirty="0"/>
+            </a:br>
+            <a:r>
+              <a:rPr lang="en-US" altLang="ko-KR" sz="2000" dirty="0"/>
+              <a:t>https://school.programmers.co.kr/learn/courses/30/lessons/17681</a:t>
+            </a:r>
+            <a:endParaRPr lang="ko-KR" altLang="en-US" sz="2000" dirty="0"/>
+          </a:p>
+        </p:txBody>
+      </p:sp>
+      <p:sp>
+        <p:nvSpPr>
+          <p:cNvPr id="5" name="슬라이드 번호 개체 틀 4">
+            <a:extLst>
+              <a:ext uri="{FF2B5EF4-FFF2-40B4-BE49-F238E27FC236}">
+                <a16:creationId xmlns:a16="http://schemas.microsoft.com/office/drawing/2014/main" id="{81099AAD-C6EA-CB4B-F77E-8434C7D5EADC}"/>
+              </a:ext>
+            </a:extLst>
+          </p:cNvPr>
+          <p:cNvSpPr>
+            <a:spLocks noGrp="1"/>
+          </p:cNvSpPr>
+          <p:nvPr>
+            <p:ph type="sldNum" sz="quarter" idx="12"/>
+          </p:nvPr>
+        </p:nvSpPr>
+        <p:spPr/>
+        <p:txBody>
+          <a:bodyPr/>
+          <a:lstStyle/>
+          <a:p>
+            <a:pPr>
+              <a:defRPr/>
+            </a:pPr>
+            <a:fld id="{A268DA64-E15D-4814-A1DA-86D92D550423}" type="slidenum">
+              <a:rPr lang="ko-KR" altLang="en-US" smtClean="0"/>
+              <a:pPr>
+                <a:defRPr/>
+              </a:pPr>
+              <a:t>11</a:t>
+            </a:fld>
+            <a:endParaRPr lang="ko-KR" altLang="en-US"/>
+          </a:p>
+        </p:txBody>
+      </p:sp>
+      <p:sp>
+        <p:nvSpPr>
+          <p:cNvPr id="3" name="내용 개체 틀 2">
+            <a:extLst>
+              <a:ext uri="{FF2B5EF4-FFF2-40B4-BE49-F238E27FC236}">
+                <a16:creationId xmlns:a16="http://schemas.microsoft.com/office/drawing/2014/main" id="{858C86E8-5349-F7B3-AFB6-B10A83FC024F}"/>
+              </a:ext>
+            </a:extLst>
+          </p:cNvPr>
+          <p:cNvSpPr>
+            <a:spLocks noGrp="1"/>
+          </p:cNvSpPr>
+          <p:nvPr>
+            <p:ph idx="1"/>
+          </p:nvPr>
+        </p:nvSpPr>
+        <p:spPr>
+          <a:xfrm>
+            <a:off x="457200" y="1340768"/>
+            <a:ext cx="8229600" cy="4785395"/>
+          </a:xfrm>
+        </p:spPr>
+        <p:txBody>
+          <a:bodyPr/>
+          <a:lstStyle/>
+          <a:p>
+            <a:pPr algn="just"/>
+            <a:r>
+              <a:rPr lang="ko-KR" altLang="en-US" sz="1800" b="0" i="0" dirty="0">
+                <a:effectLst/>
+                <a:latin typeface="Open Sans" panose="020F0502020204030204" pitchFamily="34" charset="0"/>
+              </a:rPr>
+              <a:t>지도는 한 변의 길이가 </a:t>
+            </a:r>
+            <a:r>
+              <a:rPr lang="en-US" altLang="ko-KR" sz="1800" b="0" i="0" dirty="0">
+                <a:effectLst/>
+                <a:latin typeface="Open Sans" panose="020F0502020204030204" pitchFamily="34" charset="0"/>
+              </a:rPr>
+              <a:t>n</a:t>
+            </a:r>
+            <a:r>
+              <a:rPr lang="ko-KR" altLang="en-US" sz="1800" b="0" i="0" dirty="0">
+                <a:effectLst/>
+                <a:latin typeface="Open Sans" panose="020F0502020204030204" pitchFamily="34" charset="0"/>
+              </a:rPr>
+              <a:t>인 정사각형 배열 형태로</a:t>
+            </a:r>
+            <a:r>
+              <a:rPr lang="en-US" altLang="ko-KR" sz="1800" b="0" i="0" dirty="0">
+                <a:effectLst/>
+                <a:latin typeface="Open Sans" panose="020F0502020204030204" pitchFamily="34" charset="0"/>
+              </a:rPr>
+              <a:t>, </a:t>
+            </a:r>
+            <a:r>
+              <a:rPr lang="ko-KR" altLang="en-US" sz="1800" b="0" i="0" dirty="0">
+                <a:effectLst/>
+                <a:latin typeface="Open Sans" panose="020F0502020204030204" pitchFamily="34" charset="0"/>
+              </a:rPr>
+              <a:t>각 칸은 </a:t>
+            </a:r>
+            <a:r>
+              <a:rPr lang="en-US" altLang="ko-KR" sz="1800" b="0" i="0" dirty="0">
+                <a:effectLst/>
+                <a:latin typeface="Open Sans" panose="020F0502020204030204" pitchFamily="34" charset="0"/>
+              </a:rPr>
+              <a:t>"</a:t>
+            </a:r>
+            <a:r>
+              <a:rPr lang="ko-KR" altLang="en-US" sz="1800" b="0" i="0" dirty="0">
+                <a:effectLst/>
+                <a:latin typeface="Open Sans" panose="020F0502020204030204" pitchFamily="34" charset="0"/>
+              </a:rPr>
+              <a:t>공백</a:t>
+            </a:r>
+            <a:r>
+              <a:rPr lang="en-US" altLang="ko-KR" sz="1800" b="0" i="0" dirty="0">
+                <a:effectLst/>
+                <a:latin typeface="Open Sans" panose="020F0502020204030204" pitchFamily="34" charset="0"/>
+              </a:rPr>
+              <a:t>"(" ") </a:t>
+            </a:r>
+            <a:r>
+              <a:rPr lang="ko-KR" altLang="en-US" sz="1800" b="0" i="0" dirty="0">
+                <a:effectLst/>
+                <a:latin typeface="Open Sans" panose="020F0502020204030204" pitchFamily="34" charset="0"/>
+              </a:rPr>
+              <a:t>또는 </a:t>
+            </a:r>
+            <a:r>
+              <a:rPr lang="en-US" altLang="ko-KR" sz="1800" b="0" i="0" dirty="0">
+                <a:effectLst/>
+                <a:latin typeface="Open Sans" panose="020F0502020204030204" pitchFamily="34" charset="0"/>
+              </a:rPr>
+              <a:t>"</a:t>
+            </a:r>
+            <a:r>
+              <a:rPr lang="ko-KR" altLang="en-US" sz="1800" b="0" i="0" dirty="0">
+                <a:effectLst/>
+                <a:latin typeface="Open Sans" panose="020F0502020204030204" pitchFamily="34" charset="0"/>
+              </a:rPr>
+              <a:t>벽</a:t>
+            </a:r>
+            <a:r>
+              <a:rPr lang="en-US" altLang="ko-KR" sz="1800" b="0" i="0" dirty="0">
+                <a:effectLst/>
+                <a:latin typeface="Open Sans" panose="020F0502020204030204" pitchFamily="34" charset="0"/>
+              </a:rPr>
+              <a:t>"("#") </a:t>
+            </a:r>
+            <a:r>
+              <a:rPr lang="ko-KR" altLang="en-US" sz="1800" b="0" i="0" dirty="0">
+                <a:effectLst/>
+                <a:latin typeface="Open Sans" panose="020F0502020204030204" pitchFamily="34" charset="0"/>
+              </a:rPr>
+              <a:t>두 종류로 이루어져 있다</a:t>
+            </a:r>
+            <a:r>
+              <a:rPr lang="en-US" altLang="ko-KR" sz="1800" b="0" i="0" dirty="0">
+                <a:effectLst/>
+                <a:latin typeface="Open Sans" panose="020F0502020204030204" pitchFamily="34" charset="0"/>
+              </a:rPr>
+              <a:t>.</a:t>
+            </a:r>
+          </a:p>
+          <a:p>
+            <a:pPr algn="just"/>
+            <a:r>
+              <a:rPr lang="ko-KR" altLang="en-US" sz="1800" b="0" i="0" dirty="0">
+                <a:effectLst/>
+                <a:latin typeface="Open Sans" panose="020F0502020204030204" pitchFamily="34" charset="0"/>
+              </a:rPr>
+              <a:t>전체 지도는 두 장의 지도를 겹쳐서 얻을 수 있다</a:t>
+            </a:r>
+            <a:r>
+              <a:rPr lang="en-US" altLang="ko-KR" sz="1800" b="0" i="0" dirty="0">
+                <a:effectLst/>
+                <a:latin typeface="Open Sans" panose="020F0502020204030204" pitchFamily="34" charset="0"/>
+              </a:rPr>
+              <a:t>. </a:t>
+            </a:r>
+            <a:r>
+              <a:rPr lang="ko-KR" altLang="en-US" sz="1800" b="0" i="0" dirty="0">
+                <a:effectLst/>
+                <a:latin typeface="Open Sans" panose="020F0502020204030204" pitchFamily="34" charset="0"/>
+              </a:rPr>
+              <a:t>각각 </a:t>
+            </a:r>
+            <a:r>
+              <a:rPr lang="en-US" altLang="ko-KR" sz="1800" b="0" i="0" dirty="0">
+                <a:effectLst/>
+                <a:latin typeface="Open Sans" panose="020F0502020204030204" pitchFamily="34" charset="0"/>
+              </a:rPr>
+              <a:t>"</a:t>
+            </a:r>
+            <a:r>
+              <a:rPr lang="ko-KR" altLang="en-US" sz="1800" b="0" i="0" dirty="0">
+                <a:effectLst/>
+                <a:latin typeface="Open Sans" panose="020F0502020204030204" pitchFamily="34" charset="0"/>
+              </a:rPr>
+              <a:t>지도 </a:t>
+            </a:r>
+            <a:r>
+              <a:rPr lang="en-US" altLang="ko-KR" sz="1800" b="0" i="0" dirty="0">
+                <a:effectLst/>
+                <a:latin typeface="Open Sans" panose="020F0502020204030204" pitchFamily="34" charset="0"/>
+              </a:rPr>
+              <a:t>1"</a:t>
+            </a:r>
+            <a:r>
+              <a:rPr lang="ko-KR" altLang="en-US" sz="1800" b="0" i="0" dirty="0">
+                <a:effectLst/>
+                <a:latin typeface="Open Sans" panose="020F0502020204030204" pitchFamily="34" charset="0"/>
+              </a:rPr>
+              <a:t>과 </a:t>
+            </a:r>
+            <a:r>
+              <a:rPr lang="en-US" altLang="ko-KR" sz="1800" b="0" i="0" dirty="0">
+                <a:effectLst/>
+                <a:latin typeface="Open Sans" panose="020F0502020204030204" pitchFamily="34" charset="0"/>
+              </a:rPr>
+              <a:t>"</a:t>
+            </a:r>
+            <a:r>
+              <a:rPr lang="ko-KR" altLang="en-US" sz="1800" b="0" i="0" dirty="0">
+                <a:effectLst/>
+                <a:latin typeface="Open Sans" panose="020F0502020204030204" pitchFamily="34" charset="0"/>
+              </a:rPr>
+              <a:t>지도 </a:t>
+            </a:r>
+            <a:r>
+              <a:rPr lang="en-US" altLang="ko-KR" sz="1800" b="0" i="0" dirty="0">
+                <a:effectLst/>
+                <a:latin typeface="Open Sans" panose="020F0502020204030204" pitchFamily="34" charset="0"/>
+              </a:rPr>
+              <a:t>2"</a:t>
+            </a:r>
+            <a:r>
+              <a:rPr lang="ko-KR" altLang="en-US" sz="1800" b="0" i="0" dirty="0">
+                <a:effectLst/>
+                <a:latin typeface="Open Sans" panose="020F0502020204030204" pitchFamily="34" charset="0"/>
+              </a:rPr>
+              <a:t>라고 하자</a:t>
+            </a:r>
+            <a:r>
+              <a:rPr lang="en-US" altLang="ko-KR" sz="1800" b="0" i="0" dirty="0">
+                <a:effectLst/>
+                <a:latin typeface="Open Sans" panose="020F0502020204030204" pitchFamily="34" charset="0"/>
+              </a:rPr>
+              <a:t>. </a:t>
+            </a:r>
+            <a:r>
+              <a:rPr lang="ko-KR" altLang="en-US" sz="1800" b="0" i="0" dirty="0">
+                <a:effectLst/>
+                <a:latin typeface="Open Sans" panose="020F0502020204030204" pitchFamily="34" charset="0"/>
+              </a:rPr>
+              <a:t>지도 </a:t>
+            </a:r>
+            <a:r>
+              <a:rPr lang="en-US" altLang="ko-KR" sz="1800" b="0" i="0" dirty="0">
+                <a:effectLst/>
+                <a:latin typeface="Open Sans" panose="020F0502020204030204" pitchFamily="34" charset="0"/>
+              </a:rPr>
+              <a:t>1 </a:t>
+            </a:r>
+            <a:r>
+              <a:rPr lang="ko-KR" altLang="en-US" sz="1800" b="0" i="0" dirty="0">
+                <a:effectLst/>
+                <a:latin typeface="Open Sans" panose="020F0502020204030204" pitchFamily="34" charset="0"/>
+              </a:rPr>
+              <a:t>또는 지도 </a:t>
+            </a:r>
+            <a:r>
+              <a:rPr lang="en-US" altLang="ko-KR" sz="1800" b="0" i="0" dirty="0">
+                <a:effectLst/>
+                <a:latin typeface="Open Sans" panose="020F0502020204030204" pitchFamily="34" charset="0"/>
+              </a:rPr>
+              <a:t>2 </a:t>
+            </a:r>
+            <a:r>
+              <a:rPr lang="ko-KR" altLang="en-US" sz="1800" b="0" i="0" dirty="0">
+                <a:effectLst/>
+                <a:latin typeface="Open Sans" panose="020F0502020204030204" pitchFamily="34" charset="0"/>
+              </a:rPr>
+              <a:t>중 어느 하나라도 벽인 부분은 전체 지도에서도 벽이다</a:t>
+            </a:r>
+            <a:r>
+              <a:rPr lang="en-US" altLang="ko-KR" sz="1800" b="0" i="0" dirty="0">
+                <a:effectLst/>
+                <a:latin typeface="Open Sans" panose="020F0502020204030204" pitchFamily="34" charset="0"/>
+              </a:rPr>
+              <a:t>. </a:t>
+            </a:r>
+            <a:r>
+              <a:rPr lang="ko-KR" altLang="en-US" sz="1800" b="0" i="0" dirty="0">
+                <a:effectLst/>
+                <a:latin typeface="Open Sans" panose="020F0502020204030204" pitchFamily="34" charset="0"/>
+              </a:rPr>
+              <a:t>지도 </a:t>
+            </a:r>
+            <a:r>
+              <a:rPr lang="en-US" altLang="ko-KR" sz="1800" b="0" i="0" dirty="0">
+                <a:effectLst/>
+                <a:latin typeface="Open Sans" panose="020F0502020204030204" pitchFamily="34" charset="0"/>
+              </a:rPr>
+              <a:t>1</a:t>
+            </a:r>
+            <a:r>
+              <a:rPr lang="ko-KR" altLang="en-US" sz="1800" b="0" i="0" dirty="0">
+                <a:effectLst/>
+                <a:latin typeface="Open Sans" panose="020F0502020204030204" pitchFamily="34" charset="0"/>
+              </a:rPr>
+              <a:t>과 지도 </a:t>
+            </a:r>
+            <a:r>
+              <a:rPr lang="en-US" altLang="ko-KR" sz="1800" b="0" i="0" dirty="0">
+                <a:effectLst/>
+                <a:latin typeface="Open Sans" panose="020F0502020204030204" pitchFamily="34" charset="0"/>
+              </a:rPr>
+              <a:t>2</a:t>
+            </a:r>
+            <a:r>
+              <a:rPr lang="ko-KR" altLang="en-US" sz="1800" b="0" i="0" dirty="0">
+                <a:effectLst/>
+                <a:latin typeface="Open Sans" panose="020F0502020204030204" pitchFamily="34" charset="0"/>
+              </a:rPr>
+              <a:t>에서 모두 공백인 부분은 전체 지도에서도 공백이다</a:t>
+            </a:r>
+            <a:r>
+              <a:rPr lang="en-US" altLang="ko-KR" sz="1800" b="0" i="0" dirty="0">
+                <a:effectLst/>
+                <a:latin typeface="Open Sans" panose="020F0502020204030204" pitchFamily="34" charset="0"/>
+              </a:rPr>
+              <a:t>.</a:t>
+            </a:r>
+          </a:p>
+          <a:p>
+            <a:pPr algn="just"/>
+            <a:r>
+              <a:rPr lang="en-US" altLang="ko-KR" sz="1800" b="0" i="0" dirty="0">
+                <a:effectLst/>
+                <a:latin typeface="Open Sans" panose="020F0502020204030204" pitchFamily="34" charset="0"/>
+              </a:rPr>
+              <a:t>"</a:t>
+            </a:r>
+            <a:r>
+              <a:rPr lang="ko-KR" altLang="en-US" sz="1800" b="0" i="0" dirty="0">
+                <a:effectLst/>
+                <a:latin typeface="Open Sans" panose="020F0502020204030204" pitchFamily="34" charset="0"/>
+              </a:rPr>
+              <a:t>지도 </a:t>
+            </a:r>
+            <a:r>
+              <a:rPr lang="en-US" altLang="ko-KR" sz="1800" b="0" i="0" dirty="0">
+                <a:effectLst/>
+                <a:latin typeface="Open Sans" panose="020F0502020204030204" pitchFamily="34" charset="0"/>
+              </a:rPr>
+              <a:t>1"</a:t>
+            </a:r>
+            <a:r>
+              <a:rPr lang="ko-KR" altLang="en-US" sz="1800" b="0" i="0" dirty="0">
+                <a:effectLst/>
+                <a:latin typeface="Open Sans" panose="020F0502020204030204" pitchFamily="34" charset="0"/>
+              </a:rPr>
+              <a:t>과 </a:t>
+            </a:r>
+            <a:r>
+              <a:rPr lang="en-US" altLang="ko-KR" sz="1800" b="0" i="0" dirty="0">
+                <a:effectLst/>
+                <a:latin typeface="Open Sans" panose="020F0502020204030204" pitchFamily="34" charset="0"/>
+              </a:rPr>
+              <a:t>"</a:t>
+            </a:r>
+            <a:r>
+              <a:rPr lang="ko-KR" altLang="en-US" sz="1800" b="0" i="0" dirty="0">
+                <a:effectLst/>
+                <a:latin typeface="Open Sans" panose="020F0502020204030204" pitchFamily="34" charset="0"/>
+              </a:rPr>
+              <a:t>지도 </a:t>
+            </a:r>
+            <a:r>
+              <a:rPr lang="en-US" altLang="ko-KR" sz="1800" b="0" i="0" dirty="0">
+                <a:effectLst/>
+                <a:latin typeface="Open Sans" panose="020F0502020204030204" pitchFamily="34" charset="0"/>
+              </a:rPr>
+              <a:t>2"</a:t>
+            </a:r>
+            <a:r>
+              <a:rPr lang="ko-KR" altLang="en-US" sz="1800" b="0" i="0" dirty="0">
+                <a:effectLst/>
+                <a:latin typeface="Open Sans" panose="020F0502020204030204" pitchFamily="34" charset="0"/>
+              </a:rPr>
+              <a:t>는 각각 정수 배열로 암호화되어 있다</a:t>
+            </a:r>
+            <a:r>
+              <a:rPr lang="en-US" altLang="ko-KR" sz="1800" b="0" i="0" dirty="0">
+                <a:effectLst/>
+                <a:latin typeface="Open Sans" panose="020F0502020204030204" pitchFamily="34" charset="0"/>
+              </a:rPr>
+              <a:t>.</a:t>
+            </a:r>
+          </a:p>
+          <a:p>
+            <a:pPr algn="just"/>
+            <a:r>
+              <a:rPr lang="ko-KR" altLang="en-US" sz="1800" b="0" i="0" dirty="0">
+                <a:effectLst/>
+                <a:latin typeface="Open Sans" panose="020F0502020204030204" pitchFamily="34" charset="0"/>
+              </a:rPr>
+              <a:t>암호화된 배열은 지도의 각 가로줄에서 벽 부분을 </a:t>
+            </a:r>
+            <a:r>
+              <a:rPr lang="en-US" altLang="ko-KR" sz="1800" b="0" i="0" dirty="0">
+                <a:effectLst/>
+                <a:latin typeface="Open Sans" panose="020F0502020204030204" pitchFamily="34" charset="0"/>
+              </a:rPr>
+              <a:t>1, </a:t>
+            </a:r>
+            <a:r>
+              <a:rPr lang="ko-KR" altLang="en-US" sz="1800" b="0" i="0" dirty="0">
+                <a:effectLst/>
+                <a:latin typeface="Open Sans" panose="020F0502020204030204" pitchFamily="34" charset="0"/>
+              </a:rPr>
+              <a:t>공백 부분을 </a:t>
+            </a:r>
+            <a:r>
+              <a:rPr lang="en-US" altLang="ko-KR" sz="1800" b="0" i="0" dirty="0">
+                <a:effectLst/>
+                <a:latin typeface="Open Sans" panose="020F0502020204030204" pitchFamily="34" charset="0"/>
+              </a:rPr>
+              <a:t>0</a:t>
+            </a:r>
+            <a:r>
+              <a:rPr lang="ko-KR" altLang="en-US" sz="1800" b="0" i="0" dirty="0">
+                <a:effectLst/>
+                <a:latin typeface="Open Sans" panose="020F0502020204030204" pitchFamily="34" charset="0"/>
+              </a:rPr>
+              <a:t>으로 </a:t>
+            </a:r>
+            <a:r>
+              <a:rPr lang="ko-KR" altLang="en-US" sz="1800" b="0" i="0" dirty="0" err="1">
+                <a:effectLst/>
+                <a:latin typeface="Open Sans" panose="020F0502020204030204" pitchFamily="34" charset="0"/>
+              </a:rPr>
+              <a:t>부호화했을</a:t>
+            </a:r>
+            <a:r>
+              <a:rPr lang="ko-KR" altLang="en-US" sz="1800" b="0" i="0" dirty="0">
+                <a:effectLst/>
+                <a:latin typeface="Open Sans" panose="020F0502020204030204" pitchFamily="34" charset="0"/>
+              </a:rPr>
+              <a:t> 때 얻어지는 이진수에 해당하는 값의 배열이다</a:t>
+            </a:r>
+            <a:r>
+              <a:rPr lang="en-US" altLang="ko-KR" sz="1800" b="0" i="0" dirty="0">
+                <a:effectLst/>
+                <a:latin typeface="Open Sans" panose="020F0502020204030204" pitchFamily="34" charset="0"/>
+              </a:rPr>
+              <a:t>.</a:t>
+            </a:r>
+          </a:p>
+          <a:p>
+            <a:pPr algn="just"/>
+            <a:r>
+              <a:rPr lang="ko-KR" altLang="en-US" sz="1800" b="0" i="0" dirty="0">
+                <a:effectLst/>
+                <a:latin typeface="Open Sans" panose="020F0502020204030204" pitchFamily="34" charset="0"/>
+              </a:rPr>
+              <a:t>원래의 비밀지도를 해독하여 </a:t>
+            </a:r>
+            <a:r>
+              <a:rPr lang="en-US" altLang="ko-KR" sz="1800" b="0" i="0" dirty="0">
+                <a:effectLst/>
+                <a:latin typeface="Open Sans" panose="020F0502020204030204" pitchFamily="34" charset="0"/>
+              </a:rPr>
+              <a:t>'#', </a:t>
+            </a:r>
+            <a:r>
+              <a:rPr lang="ko-KR" altLang="en-US" sz="1800" b="0" i="0" dirty="0">
+                <a:effectLst/>
+                <a:latin typeface="Open Sans" panose="020F0502020204030204" pitchFamily="34" charset="0"/>
+              </a:rPr>
+              <a:t>공백으로 구성된 문자열 배열로 출력하라</a:t>
+            </a:r>
+            <a:r>
+              <a:rPr lang="en-US" altLang="ko-KR" sz="1800" b="0" i="0" dirty="0">
+                <a:effectLst/>
+                <a:latin typeface="Open Sans" panose="020F0502020204030204" pitchFamily="34" charset="0"/>
+              </a:rPr>
+              <a:t>. </a:t>
+            </a:r>
+          </a:p>
+          <a:p>
+            <a:pPr algn="just"/>
+            <a:endParaRPr lang="en-US" altLang="ko-KR" sz="1800" b="0" i="0" dirty="0">
+              <a:effectLst/>
+              <a:latin typeface="Open Sans" panose="020F0502020204030204" pitchFamily="34" charset="0"/>
+            </a:endParaRPr>
+          </a:p>
+        </p:txBody>
+      </p:sp>
+      <p:pic>
+        <p:nvPicPr>
+          <p:cNvPr id="11" name="그림 10">
+            <a:extLst>
+              <a:ext uri="{FF2B5EF4-FFF2-40B4-BE49-F238E27FC236}">
+                <a16:creationId xmlns:a16="http://schemas.microsoft.com/office/drawing/2014/main" id="{45F1FA4E-87F5-E4BA-223F-3803A514AF26}"/>
+              </a:ext>
+            </a:extLst>
+          </p:cNvPr>
+          <p:cNvPicPr>
+            <a:picLocks noChangeAspect="1"/>
+          </p:cNvPicPr>
+          <p:nvPr/>
+        </p:nvPicPr>
+        <p:blipFill>
+          <a:blip r:embed="rId3"/>
+          <a:stretch>
+            <a:fillRect/>
+          </a:stretch>
+        </p:blipFill>
+        <p:spPr>
+          <a:xfrm>
+            <a:off x="1833004" y="4111890"/>
+            <a:ext cx="5477991" cy="2451069"/>
+          </a:xfrm>
+          <a:prstGeom prst="rect">
+            <a:avLst/>
+          </a:prstGeom>
+        </p:spPr>
+      </p:pic>
+    </p:spTree>
+    <p:extLst>
+      <p:ext uri="{BB962C8B-B14F-4D97-AF65-F5344CB8AC3E}">
+        <p14:creationId xmlns:p14="http://schemas.microsoft.com/office/powerpoint/2010/main" val="2988214561"/>
+      </p:ext>
+    </p:extLst>
+  </p:cSld>
+  <p:clrMapOvr>
+    <a:masterClrMapping/>
+  </p:clrMapOvr>
+</p:sld>
+</file>
+
+<file path=ppt/slides/slide12.xml><?xml version="1.0" encoding="utf-8"?>
+<p:sld xmlns:a="http://schemas.openxmlformats.org/drawingml/2006/main" xmlns:r="http://schemas.openxmlformats.org/officeDocument/2006/relationships" xmlns:p="http://schemas.openxmlformats.org/presentationml/2006/main">
+  <p:cSld>
+    <p:spTree>
+      <p:nvGrpSpPr>
+        <p:cNvPr id="1" name="">
+          <a:extLst>
+            <a:ext uri="{FF2B5EF4-FFF2-40B4-BE49-F238E27FC236}">
+              <a16:creationId xmlns:a16="http://schemas.microsoft.com/office/drawing/2014/main" id="{E8F93FCF-3F08-E0F4-5108-31984F44175D}"/>
+            </a:ext>
+          </a:extLst>
+        </p:cNvPr>
+        <p:cNvGrpSpPr/>
+        <p:nvPr/>
+      </p:nvGrpSpPr>
+      <p:grpSpPr>
+        <a:xfrm>
+          <a:off x="0" y="0"/>
+          <a:ext cx="0" cy="0"/>
+          <a:chOff x="0" y="0"/>
+          <a:chExt cx="0" cy="0"/>
+        </a:xfrm>
+      </p:grpSpPr>
+      <p:sp>
+        <p:nvSpPr>
+          <p:cNvPr id="2" name="제목 1">
+            <a:extLst>
+              <a:ext uri="{FF2B5EF4-FFF2-40B4-BE49-F238E27FC236}">
+                <a16:creationId xmlns:a16="http://schemas.microsoft.com/office/drawing/2014/main" id="{E7818B47-20D8-CDD6-F074-07282F3BE498}"/>
+              </a:ext>
+            </a:extLst>
+          </p:cNvPr>
+          <p:cNvSpPr>
+            <a:spLocks noGrp="1"/>
+          </p:cNvSpPr>
+          <p:nvPr>
+            <p:ph type="title"/>
+          </p:nvPr>
+        </p:nvSpPr>
+        <p:spPr/>
+        <p:txBody>
+          <a:bodyPr/>
+          <a:lstStyle/>
+          <a:p>
+            <a:r>
+              <a:rPr lang="en-US" altLang="ko-KR" sz="2800" dirty="0"/>
+              <a:t>4. </a:t>
+            </a:r>
+            <a:r>
+              <a:rPr lang="ko-KR" altLang="en-US" sz="2800" dirty="0"/>
+              <a:t>비밀지도</a:t>
+            </a:r>
+            <a:r>
+              <a:rPr lang="en-US" altLang="ko-KR" sz="2800" dirty="0"/>
+              <a:t>(Programmers, </a:t>
+            </a:r>
+            <a:r>
+              <a:rPr lang="ko-KR" altLang="en-US" sz="2800" dirty="0"/>
+              <a:t>구현</a:t>
+            </a:r>
+            <a:r>
+              <a:rPr lang="en-US" altLang="ko-KR" sz="2800" dirty="0"/>
+              <a:t>) </a:t>
+            </a:r>
+            <a:br>
+              <a:rPr lang="en-US" altLang="ko-KR" sz="2800" dirty="0"/>
+            </a:br>
+            <a:r>
+              <a:rPr lang="en-US" altLang="ko-KR" sz="2000" dirty="0"/>
+              <a:t>https://school.programmers.co.kr/learn/courses/30/lessons/17681</a:t>
+            </a:r>
+            <a:endParaRPr lang="ko-KR" altLang="en-US" sz="2000" dirty="0"/>
+          </a:p>
+        </p:txBody>
+      </p:sp>
+      <p:sp>
+        <p:nvSpPr>
+          <p:cNvPr id="5" name="슬라이드 번호 개체 틀 4">
+            <a:extLst>
+              <a:ext uri="{FF2B5EF4-FFF2-40B4-BE49-F238E27FC236}">
+                <a16:creationId xmlns:a16="http://schemas.microsoft.com/office/drawing/2014/main" id="{CE124102-0D47-DB9A-6FB9-A656E4472396}"/>
+              </a:ext>
+            </a:extLst>
+          </p:cNvPr>
+          <p:cNvSpPr>
+            <a:spLocks noGrp="1"/>
+          </p:cNvSpPr>
+          <p:nvPr>
+            <p:ph type="sldNum" sz="quarter" idx="12"/>
+          </p:nvPr>
+        </p:nvSpPr>
+        <p:spPr/>
+        <p:txBody>
+          <a:bodyPr/>
+          <a:lstStyle/>
+          <a:p>
+            <a:pPr>
+              <a:defRPr/>
+            </a:pPr>
+            <a:fld id="{A268DA64-E15D-4814-A1DA-86D92D550423}" type="slidenum">
+              <a:rPr lang="ko-KR" altLang="en-US" smtClean="0"/>
+              <a:pPr>
+                <a:defRPr/>
+              </a:pPr>
+              <a:t>12</a:t>
+            </a:fld>
+            <a:endParaRPr lang="ko-KR" altLang="en-US"/>
+          </a:p>
+        </p:txBody>
+      </p:sp>
+      <p:pic>
+        <p:nvPicPr>
+          <p:cNvPr id="8" name="그림 7">
+            <a:extLst>
+              <a:ext uri="{FF2B5EF4-FFF2-40B4-BE49-F238E27FC236}">
+                <a16:creationId xmlns:a16="http://schemas.microsoft.com/office/drawing/2014/main" id="{8EF56E33-8E2E-3D60-30E3-B02A001EC9C2}"/>
+              </a:ext>
+            </a:extLst>
+          </p:cNvPr>
+          <p:cNvPicPr>
+            <a:picLocks noChangeAspect="1"/>
+          </p:cNvPicPr>
+          <p:nvPr/>
+        </p:nvPicPr>
+        <p:blipFill>
+          <a:blip r:embed="rId3"/>
+          <a:stretch>
+            <a:fillRect/>
+          </a:stretch>
+        </p:blipFill>
+        <p:spPr>
+          <a:xfrm>
+            <a:off x="653087" y="1484784"/>
+            <a:ext cx="4350961" cy="4747146"/>
+          </a:xfrm>
+          <a:prstGeom prst="rect">
+            <a:avLst/>
+          </a:prstGeom>
+        </p:spPr>
+      </p:pic>
+      <p:pic>
+        <p:nvPicPr>
+          <p:cNvPr id="10" name="그림 9">
+            <a:extLst>
+              <a:ext uri="{FF2B5EF4-FFF2-40B4-BE49-F238E27FC236}">
+                <a16:creationId xmlns:a16="http://schemas.microsoft.com/office/drawing/2014/main" id="{103FED87-D4EA-BD72-0524-A1D507CA3EFF}"/>
+              </a:ext>
+            </a:extLst>
+          </p:cNvPr>
+          <p:cNvPicPr>
+            <a:picLocks noChangeAspect="1"/>
+          </p:cNvPicPr>
+          <p:nvPr/>
+        </p:nvPicPr>
+        <p:blipFill>
+          <a:blip r:embed="rId4"/>
+          <a:stretch>
+            <a:fillRect/>
+          </a:stretch>
+        </p:blipFill>
+        <p:spPr>
+          <a:xfrm>
+            <a:off x="6097592" y="2708920"/>
+            <a:ext cx="2236637" cy="2257094"/>
+          </a:xfrm>
+          <a:prstGeom prst="rect">
+            <a:avLst/>
+          </a:prstGeom>
+        </p:spPr>
+      </p:pic>
+      <p:sp>
+        <p:nvSpPr>
+          <p:cNvPr id="12" name="화살표: 오른쪽 11">
+            <a:extLst>
+              <a:ext uri="{FF2B5EF4-FFF2-40B4-BE49-F238E27FC236}">
+                <a16:creationId xmlns:a16="http://schemas.microsoft.com/office/drawing/2014/main" id="{6D9EB52F-1E06-CFB4-EBC1-C044FD36702A}"/>
+              </a:ext>
+            </a:extLst>
+          </p:cNvPr>
+          <p:cNvSpPr/>
+          <p:nvPr/>
+        </p:nvSpPr>
+        <p:spPr>
+          <a:xfrm>
+            <a:off x="5364088" y="3573016"/>
+            <a:ext cx="504056" cy="576064"/>
+          </a:xfrm>
+          <a:prstGeom prst="rightArrow">
+            <a:avLst/>
+          </a:prstGeom>
+        </p:spPr>
+        <p:style>
+          <a:lnRef idx="2">
+            <a:schemeClr val="accent1">
+              <a:shade val="15000"/>
+            </a:schemeClr>
+          </a:lnRef>
+          <a:fillRef idx="1">
+            <a:schemeClr val="accent1"/>
+          </a:fillRef>
+          <a:effectRef idx="0">
+            <a:schemeClr val="accent1"/>
+          </a:effectRef>
+          <a:fontRef idx="minor">
+            <a:schemeClr val="lt1"/>
+          </a:fontRef>
+        </p:style>
+        <p:txBody>
+          <a:bodyPr rtlCol="0" anchor="ctr"/>
+          <a:lstStyle/>
+          <a:p>
+            <a:pPr algn="ctr"/>
+            <a:endParaRPr lang="ko-KR" altLang="en-US"/>
+          </a:p>
+        </p:txBody>
+      </p:sp>
+    </p:spTree>
+    <p:extLst>
+      <p:ext uri="{BB962C8B-B14F-4D97-AF65-F5344CB8AC3E}">
+        <p14:creationId xmlns:p14="http://schemas.microsoft.com/office/powerpoint/2010/main" val="2323102850"/>
+      </p:ext>
+    </p:extLst>
+  </p:cSld>
+  <p:clrMapOvr>
+    <a:masterClrMapping/>
+  </p:clrMapOvr>
+</p:sld>
+</file>
+
+<file path=ppt/slides/slide13.xml><?xml version="1.0" encoding="utf-8"?>
+<p:sld xmlns:a="http://schemas.openxmlformats.org/drawingml/2006/main" xmlns:r="http://schemas.openxmlformats.org/officeDocument/2006/relationships" xmlns:p="http://schemas.openxmlformats.org/presentationml/2006/main">
+  <p:cSld>
+    <p:spTree>
+      <p:nvGrpSpPr>
+        <p:cNvPr id="1" name=""/>
+        <p:cNvGrpSpPr/>
+        <p:nvPr/>
+      </p:nvGrpSpPr>
+      <p:grpSpPr>
+        <a:xfrm>
+          <a:off x="0" y="0"/>
+          <a:ext cx="0" cy="0"/>
+          <a:chOff x="0" y="0"/>
+          <a:chExt cx="0" cy="0"/>
+        </a:xfrm>
+      </p:grpSpPr>
+      <p:sp>
+        <p:nvSpPr>
+          <p:cNvPr id="2" name="제목 1">
+            <a:extLst>
+              <a:ext uri="{FF2B5EF4-FFF2-40B4-BE49-F238E27FC236}">
+                <a16:creationId xmlns:a16="http://schemas.microsoft.com/office/drawing/2014/main" id="{0E651BAE-EE93-7099-957F-A0B1DF89C15C}"/>
+              </a:ext>
+            </a:extLst>
+          </p:cNvPr>
+          <p:cNvSpPr>
+            <a:spLocks noGrp="1"/>
+          </p:cNvSpPr>
+          <p:nvPr>
+            <p:ph type="title"/>
+          </p:nvPr>
+        </p:nvSpPr>
+        <p:spPr/>
+        <p:txBody>
+          <a:bodyPr/>
+          <a:lstStyle/>
+          <a:p>
+            <a:endParaRPr lang="ko-KR" altLang="en-US"/>
+          </a:p>
+        </p:txBody>
+      </p:sp>
+      <p:pic>
+        <p:nvPicPr>
+          <p:cNvPr id="7" name="내용 개체 틀 6">
+            <a:extLst>
+              <a:ext uri="{FF2B5EF4-FFF2-40B4-BE49-F238E27FC236}">
+                <a16:creationId xmlns:a16="http://schemas.microsoft.com/office/drawing/2014/main" id="{5536F280-1895-6CF4-C7A5-A1A646E7E8AB}"/>
+              </a:ext>
+            </a:extLst>
+          </p:cNvPr>
+          <p:cNvPicPr>
+            <a:picLocks noGrp="1" noChangeAspect="1"/>
+          </p:cNvPicPr>
+          <p:nvPr>
+            <p:ph idx="1"/>
+          </p:nvPr>
+        </p:nvPicPr>
+        <p:blipFill>
+          <a:blip r:embed="rId2"/>
+          <a:stretch>
+            <a:fillRect/>
+          </a:stretch>
+        </p:blipFill>
+        <p:spPr bwMode="auto">
+          <a:xfrm>
+            <a:off x="269675" y="1416671"/>
+            <a:ext cx="3866739" cy="4024658"/>
+          </a:xfrm>
+          <a:prstGeom prst="rect">
+            <a:avLst/>
+          </a:prstGeom>
+          <a:noFill/>
+          <a:ln>
+            <a:noFill/>
+          </a:ln>
+          <a:extLst>
+            <a:ext uri="{909E8E84-426E-40DD-AFC4-6F175D3DCCD1}">
+              <a14:hiddenFill xmlns:a14="http://schemas.microsoft.com/office/drawing/2010/main">
+                <a:solidFill>
+                  <a:srgbClr val="FFFFFF"/>
+                </a:solidFill>
+              </a14:hiddenFill>
+            </a:ext>
+            <a:ext uri="{91240B29-F687-4F45-9708-019B960494DF}">
+              <a14:hiddenLine xmlns:a14="http://schemas.microsoft.com/office/drawing/2010/main" w="9525">
+                <a:solidFill>
+                  <a:srgbClr val="000000"/>
+                </a:solidFill>
+                <a:miter lim="800000"/>
+                <a:headEnd/>
+                <a:tailEnd/>
+              </a14:hiddenLine>
+            </a:ext>
+          </a:extLst>
+        </p:spPr>
+      </p:pic>
+      <p:sp>
+        <p:nvSpPr>
+          <p:cNvPr id="4" name="날짜 개체 틀 3">
+            <a:extLst>
+              <a:ext uri="{FF2B5EF4-FFF2-40B4-BE49-F238E27FC236}">
+                <a16:creationId xmlns:a16="http://schemas.microsoft.com/office/drawing/2014/main" id="{94650B27-A67B-726B-1A51-F0D95084328E}"/>
+              </a:ext>
+            </a:extLst>
+          </p:cNvPr>
+          <p:cNvSpPr>
+            <a:spLocks noGrp="1"/>
+          </p:cNvSpPr>
+          <p:nvPr>
+            <p:ph type="dt" sz="half" idx="10"/>
+          </p:nvPr>
+        </p:nvSpPr>
+        <p:spPr/>
+        <p:txBody>
+          <a:bodyPr/>
+          <a:lstStyle/>
+          <a:p>
+            <a:pPr>
+              <a:defRPr/>
+            </a:pPr>
+            <a:r>
+              <a:rPr lang="en-US" altLang="ko-KR"/>
+              <a:t>2008</a:t>
+            </a:r>
+            <a:r>
+              <a:rPr lang="ko-KR" altLang="en-US"/>
+              <a:t>년</a:t>
+            </a:r>
+            <a:r>
+              <a:rPr lang="en-US" altLang="ko-KR"/>
+              <a:t>2</a:t>
+            </a:r>
+            <a:r>
+              <a:rPr lang="ko-KR" altLang="en-US"/>
+              <a:t>학기 </a:t>
+            </a:r>
+            <a:r>
+              <a:rPr lang="en-US" altLang="ko-KR"/>
+              <a:t>3D</a:t>
+            </a:r>
+            <a:r>
+              <a:rPr lang="ko-KR" altLang="en-US"/>
+              <a:t>게임프로그래밍</a:t>
+            </a:r>
+            <a:r>
+              <a:rPr lang="en-US" altLang="ko-KR"/>
+              <a:t>II </a:t>
+            </a:r>
+            <a:r>
+              <a:rPr lang="ko-KR" altLang="en-US"/>
+              <a:t>담당교수</a:t>
+            </a:r>
+            <a:r>
+              <a:rPr lang="en-US" altLang="ko-KR"/>
+              <a:t>:</a:t>
+            </a:r>
+            <a:r>
+              <a:rPr lang="ko-KR" altLang="en-US"/>
+              <a:t>김영식</a:t>
+            </a:r>
+          </a:p>
+        </p:txBody>
+      </p:sp>
+      <p:sp>
+        <p:nvSpPr>
+          <p:cNvPr id="5" name="슬라이드 번호 개체 틀 4">
+            <a:extLst>
+              <a:ext uri="{FF2B5EF4-FFF2-40B4-BE49-F238E27FC236}">
+                <a16:creationId xmlns:a16="http://schemas.microsoft.com/office/drawing/2014/main" id="{09D01B24-DE00-8C2B-5040-8CB587372F9F}"/>
+              </a:ext>
+            </a:extLst>
+          </p:cNvPr>
+          <p:cNvSpPr>
+            <a:spLocks noGrp="1"/>
+          </p:cNvSpPr>
+          <p:nvPr>
+            <p:ph type="sldNum" sz="quarter" idx="12"/>
+          </p:nvPr>
+        </p:nvSpPr>
+        <p:spPr/>
+        <p:txBody>
+          <a:bodyPr/>
+          <a:lstStyle/>
+          <a:p>
+            <a:pPr>
+              <a:defRPr/>
+            </a:pPr>
+            <a:fld id="{A268DA64-E15D-4814-A1DA-86D92D550423}" type="slidenum">
+              <a:rPr lang="ko-KR" altLang="en-US" smtClean="0"/>
+              <a:pPr>
+                <a:defRPr/>
+              </a:pPr>
+              <a:t>13</a:t>
+            </a:fld>
+            <a:endParaRPr lang="ko-KR" altLang="en-US"/>
+          </a:p>
+        </p:txBody>
+      </p:sp>
+      <p:pic>
+        <p:nvPicPr>
+          <p:cNvPr id="9" name="그림 8">
+            <a:extLst>
+              <a:ext uri="{FF2B5EF4-FFF2-40B4-BE49-F238E27FC236}">
+                <a16:creationId xmlns:a16="http://schemas.microsoft.com/office/drawing/2014/main" id="{D7CEC811-9EC9-8FF4-CCEF-DC39A601CF57}"/>
+              </a:ext>
+            </a:extLst>
+          </p:cNvPr>
+          <p:cNvPicPr>
+            <a:picLocks noChangeAspect="1"/>
+          </p:cNvPicPr>
+          <p:nvPr/>
+        </p:nvPicPr>
+        <p:blipFill>
+          <a:blip r:embed="rId3"/>
+          <a:stretch>
+            <a:fillRect/>
+          </a:stretch>
+        </p:blipFill>
+        <p:spPr>
+          <a:xfrm>
+            <a:off x="4152033" y="1916832"/>
+            <a:ext cx="4392488" cy="3401767"/>
+          </a:xfrm>
+          <a:prstGeom prst="rect">
+            <a:avLst/>
+          </a:prstGeom>
+        </p:spPr>
+      </p:pic>
+    </p:spTree>
+    <p:extLst>
+      <p:ext uri="{BB962C8B-B14F-4D97-AF65-F5344CB8AC3E}">
+        <p14:creationId xmlns:p14="http://schemas.microsoft.com/office/powerpoint/2010/main" val="109402336"/>
+      </p:ext>
+    </p:extLst>
+  </p:cSld>
+  <p:clrMapOvr>
+    <a:masterClrMapping/>
+  </p:clrMapOvr>
+</p:sld>
+</file>
+
+<file path=ppt/slides/slide14.xml><?xml version="1.0" encoding="utf-8"?>
+<p:sld xmlns:a="http://schemas.openxmlformats.org/drawingml/2006/main" xmlns:r="http://schemas.openxmlformats.org/officeDocument/2006/relationships" xmlns:p="http://schemas.openxmlformats.org/presentationml/2006/main">
+  <p:cSld>
+    <p:spTree>
+      <p:nvGrpSpPr>
         <p:cNvPr id="1" name="">
           <a:extLst>
             <a:ext uri="{FF2B5EF4-FFF2-40B4-BE49-F238E27FC236}">
@@ -7499,7 +8834,7 @@
               <a:pPr>
                 <a:defRPr/>
               </a:pPr>
-              <a:t>10</a:t>
+              <a:t>14</a:t>
             </a:fld>
             <a:endParaRPr lang="ko-KR" altLang="en-US"/>
           </a:p>
@@ -7559,7 +8894,7 @@
 </p:sld>
 </file>
 
-<file path=ppt/slides/slide11.xml><?xml version="1.0" encoding="utf-8"?>
+<file path=ppt/slides/slide15.xml><?xml version="1.0" encoding="utf-8"?>
 <p:sld xmlns:a="http://schemas.openxmlformats.org/drawingml/2006/main" xmlns:r="http://schemas.openxmlformats.org/officeDocument/2006/relationships" xmlns:p="http://schemas.openxmlformats.org/presentationml/2006/main">
   <p:cSld>
     <p:spTree>
@@ -7578,6 +8913,278 @@
       </p:grpSpPr>
       <p:sp>
         <p:nvSpPr>
+          <p:cNvPr id="2" name="제목 1">
+            <a:extLst>
+              <a:ext uri="{FF2B5EF4-FFF2-40B4-BE49-F238E27FC236}">
+                <a16:creationId xmlns:a16="http://schemas.microsoft.com/office/drawing/2014/main" id="{14039C39-0DDE-E230-6FB3-76D864F3D6A7}"/>
+              </a:ext>
+            </a:extLst>
+          </p:cNvPr>
+          <p:cNvSpPr>
+            <a:spLocks noGrp="1"/>
+          </p:cNvSpPr>
+          <p:nvPr>
+            <p:ph type="title"/>
+          </p:nvPr>
+        </p:nvSpPr>
+        <p:spPr/>
+        <p:txBody>
+          <a:bodyPr/>
+          <a:lstStyle/>
+          <a:p>
+            <a:endParaRPr lang="ko-KR" altLang="en-US"/>
+          </a:p>
+        </p:txBody>
+      </p:sp>
+      <p:pic>
+        <p:nvPicPr>
+          <p:cNvPr id="7" name="내용 개체 틀 6">
+            <a:extLst>
+              <a:ext uri="{FF2B5EF4-FFF2-40B4-BE49-F238E27FC236}">
+                <a16:creationId xmlns:a16="http://schemas.microsoft.com/office/drawing/2014/main" id="{E42BB373-2E0F-DA62-EE5E-9439D31A03DA}"/>
+              </a:ext>
+            </a:extLst>
+          </p:cNvPr>
+          <p:cNvPicPr>
+            <a:picLocks noGrp="1" noChangeAspect="1"/>
+          </p:cNvPicPr>
+          <p:nvPr>
+            <p:ph idx="1"/>
+          </p:nvPr>
+        </p:nvPicPr>
+        <p:blipFill>
+          <a:blip r:embed="rId2"/>
+          <a:stretch>
+            <a:fillRect/>
+          </a:stretch>
+        </p:blipFill>
+        <p:spPr bwMode="auto">
+          <a:xfrm>
+            <a:off x="457200" y="238668"/>
+            <a:ext cx="8229600" cy="1197261"/>
+          </a:xfrm>
+          <a:prstGeom prst="rect">
+            <a:avLst/>
+          </a:prstGeom>
+          <a:noFill/>
+          <a:ln>
+            <a:noFill/>
+          </a:ln>
+          <a:extLst>
+            <a:ext uri="{909E8E84-426E-40DD-AFC4-6F175D3DCCD1}">
+              <a14:hiddenFill xmlns:a14="http://schemas.microsoft.com/office/drawing/2010/main">
+                <a:solidFill>
+                  <a:srgbClr val="FFFFFF"/>
+                </a:solidFill>
+              </a14:hiddenFill>
+            </a:ext>
+            <a:ext uri="{91240B29-F687-4F45-9708-019B960494DF}">
+              <a14:hiddenLine xmlns:a14="http://schemas.microsoft.com/office/drawing/2010/main" w="9525">
+                <a:solidFill>
+                  <a:srgbClr val="000000"/>
+                </a:solidFill>
+                <a:miter lim="800000"/>
+                <a:headEnd/>
+                <a:tailEnd/>
+              </a14:hiddenLine>
+            </a:ext>
+          </a:extLst>
+        </p:spPr>
+      </p:pic>
+      <p:sp>
+        <p:nvSpPr>
+          <p:cNvPr id="4" name="날짜 개체 틀 3">
+            <a:extLst>
+              <a:ext uri="{FF2B5EF4-FFF2-40B4-BE49-F238E27FC236}">
+                <a16:creationId xmlns:a16="http://schemas.microsoft.com/office/drawing/2014/main" id="{B84053A9-7A20-0F6F-F7E7-33152DAB4C2D}"/>
+              </a:ext>
+            </a:extLst>
+          </p:cNvPr>
+          <p:cNvSpPr>
+            <a:spLocks noGrp="1"/>
+          </p:cNvSpPr>
+          <p:nvPr>
+            <p:ph type="dt" sz="half" idx="10"/>
+          </p:nvPr>
+        </p:nvSpPr>
+        <p:spPr/>
+        <p:txBody>
+          <a:bodyPr/>
+          <a:lstStyle/>
+          <a:p>
+            <a:pPr>
+              <a:defRPr/>
+            </a:pPr>
+            <a:r>
+              <a:rPr lang="en-US" altLang="ko-KR"/>
+              <a:t>2008</a:t>
+            </a:r>
+            <a:r>
+              <a:rPr lang="ko-KR" altLang="en-US"/>
+              <a:t>년</a:t>
+            </a:r>
+            <a:r>
+              <a:rPr lang="en-US" altLang="ko-KR"/>
+              <a:t>2</a:t>
+            </a:r>
+            <a:r>
+              <a:rPr lang="ko-KR" altLang="en-US"/>
+              <a:t>학기 </a:t>
+            </a:r>
+            <a:r>
+              <a:rPr lang="en-US" altLang="ko-KR"/>
+              <a:t>3D</a:t>
+            </a:r>
+            <a:r>
+              <a:rPr lang="ko-KR" altLang="en-US"/>
+              <a:t>게임프로그래밍</a:t>
+            </a:r>
+            <a:r>
+              <a:rPr lang="en-US" altLang="ko-KR"/>
+              <a:t>II </a:t>
+            </a:r>
+            <a:r>
+              <a:rPr lang="ko-KR" altLang="en-US"/>
+              <a:t>담당교수</a:t>
+            </a:r>
+            <a:r>
+              <a:rPr lang="en-US" altLang="ko-KR"/>
+              <a:t>:</a:t>
+            </a:r>
+            <a:r>
+              <a:rPr lang="ko-KR" altLang="en-US"/>
+              <a:t>김영식</a:t>
+            </a:r>
+          </a:p>
+        </p:txBody>
+      </p:sp>
+      <p:sp>
+        <p:nvSpPr>
+          <p:cNvPr id="5" name="슬라이드 번호 개체 틀 4">
+            <a:extLst>
+              <a:ext uri="{FF2B5EF4-FFF2-40B4-BE49-F238E27FC236}">
+                <a16:creationId xmlns:a16="http://schemas.microsoft.com/office/drawing/2014/main" id="{4966E921-C72C-735A-06A5-6712F2416E16}"/>
+              </a:ext>
+            </a:extLst>
+          </p:cNvPr>
+          <p:cNvSpPr>
+            <a:spLocks noGrp="1"/>
+          </p:cNvSpPr>
+          <p:nvPr>
+            <p:ph type="sldNum" sz="quarter" idx="12"/>
+          </p:nvPr>
+        </p:nvSpPr>
+        <p:spPr/>
+        <p:txBody>
+          <a:bodyPr/>
+          <a:lstStyle/>
+          <a:p>
+            <a:pPr>
+              <a:defRPr/>
+            </a:pPr>
+            <a:fld id="{A268DA64-E15D-4814-A1DA-86D92D550423}" type="slidenum">
+              <a:rPr lang="ko-KR" altLang="en-US" smtClean="0"/>
+              <a:pPr>
+                <a:defRPr/>
+              </a:pPr>
+              <a:t>15</a:t>
+            </a:fld>
+            <a:endParaRPr lang="ko-KR" altLang="en-US"/>
+          </a:p>
+        </p:txBody>
+      </p:sp>
+      <p:pic>
+        <p:nvPicPr>
+          <p:cNvPr id="9" name="그림 8">
+            <a:extLst>
+              <a:ext uri="{FF2B5EF4-FFF2-40B4-BE49-F238E27FC236}">
+                <a16:creationId xmlns:a16="http://schemas.microsoft.com/office/drawing/2014/main" id="{6B03F7CD-79D2-B54C-0675-997CBE2B299D}"/>
+              </a:ext>
+            </a:extLst>
+          </p:cNvPr>
+          <p:cNvPicPr>
+            <a:picLocks noChangeAspect="1"/>
+          </p:cNvPicPr>
+          <p:nvPr/>
+        </p:nvPicPr>
+        <p:blipFill>
+          <a:blip r:embed="rId3"/>
+          <a:stretch>
+            <a:fillRect/>
+          </a:stretch>
+        </p:blipFill>
+        <p:spPr>
+          <a:xfrm>
+            <a:off x="611560" y="1857346"/>
+            <a:ext cx="3731569" cy="4077587"/>
+          </a:xfrm>
+          <a:prstGeom prst="rect">
+            <a:avLst/>
+          </a:prstGeom>
+        </p:spPr>
+      </p:pic>
+      <p:pic>
+        <p:nvPicPr>
+          <p:cNvPr id="11" name="그림 10">
+            <a:extLst>
+              <a:ext uri="{FF2B5EF4-FFF2-40B4-BE49-F238E27FC236}">
+                <a16:creationId xmlns:a16="http://schemas.microsoft.com/office/drawing/2014/main" id="{6166731D-A53E-BB6C-FC9B-E9F6D9CC76E8}"/>
+              </a:ext>
+            </a:extLst>
+          </p:cNvPr>
+          <p:cNvPicPr>
+            <a:picLocks noChangeAspect="1"/>
+          </p:cNvPicPr>
+          <p:nvPr/>
+        </p:nvPicPr>
+        <p:blipFill>
+          <a:blip r:embed="rId4"/>
+          <a:stretch>
+            <a:fillRect/>
+          </a:stretch>
+        </p:blipFill>
+        <p:spPr>
+          <a:xfrm>
+            <a:off x="4716016" y="1856930"/>
+            <a:ext cx="3439847" cy="4078418"/>
+          </a:xfrm>
+          <a:prstGeom prst="rect">
+            <a:avLst/>
+          </a:prstGeom>
+        </p:spPr>
+      </p:pic>
+    </p:spTree>
+    <p:extLst>
+      <p:ext uri="{BB962C8B-B14F-4D97-AF65-F5344CB8AC3E}">
+        <p14:creationId xmlns:p14="http://schemas.microsoft.com/office/powerpoint/2010/main" val="2966804756"/>
+      </p:ext>
+    </p:extLst>
+  </p:cSld>
+  <p:clrMapOvr>
+    <a:masterClrMapping/>
+  </p:clrMapOvr>
+</p:sld>
+</file>
+
+<file path=ppt/slides/slide16.xml><?xml version="1.0" encoding="utf-8"?>
+<p:sld xmlns:a="http://schemas.openxmlformats.org/drawingml/2006/main" xmlns:r="http://schemas.openxmlformats.org/officeDocument/2006/relationships" xmlns:p="http://schemas.openxmlformats.org/presentationml/2006/main">
+  <p:cSld>
+    <p:spTree>
+      <p:nvGrpSpPr>
+        <p:cNvPr id="1" name=""/>
+        <p:cNvGrpSpPr/>
+        <p:nvPr/>
+      </p:nvGrpSpPr>
+      <p:grpSpPr>
+        <a:xfrm>
+          <a:off x="0" y="0"/>
+          <a:ext cx="0" cy="0"/>
+          <a:chOff x="0" y="0"/>
+          <a:chExt cx="0" cy="0"/>
+        </a:xfrm>
+      </p:grpSpPr>
+      <p:sp>
+        <p:nvSpPr>
           <p:cNvPr id="2" name="제목 1"/>
           <p:cNvSpPr>
             <a:spLocks noGrp="1"/>
@@ -7922,7 +9529,7 @@
               <a:pPr>
                 <a:defRPr/>
               </a:pPr>
-              <a:t>11</a:t>
+              <a:t>16</a:t>
             </a:fld>
             <a:endParaRPr lang="ko-KR" altLang="en-US"/>
           </a:p>
@@ -7941,7 +9548,279 @@
 </p:sld>
 </file>
 
-<file path=ppt/slides/slide12.xml><?xml version="1.0" encoding="utf-8"?>
+<file path=ppt/slides/slide17.xml><?xml version="1.0" encoding="utf-8"?>
+<p:sld xmlns:a="http://schemas.openxmlformats.org/drawingml/2006/main" xmlns:r="http://schemas.openxmlformats.org/officeDocument/2006/relationships" xmlns:p="http://schemas.openxmlformats.org/presentationml/2006/main">
+  <p:cSld>
+    <p:spTree>
+      <p:nvGrpSpPr>
+        <p:cNvPr id="1" name=""/>
+        <p:cNvGrpSpPr/>
+        <p:nvPr/>
+      </p:nvGrpSpPr>
+      <p:grpSpPr>
+        <a:xfrm>
+          <a:off x="0" y="0"/>
+          <a:ext cx="0" cy="0"/>
+          <a:chOff x="0" y="0"/>
+          <a:chExt cx="0" cy="0"/>
+        </a:xfrm>
+      </p:grpSpPr>
+      <p:sp>
+        <p:nvSpPr>
+          <p:cNvPr id="2" name="제목 1">
+            <a:extLst>
+              <a:ext uri="{FF2B5EF4-FFF2-40B4-BE49-F238E27FC236}">
+                <a16:creationId xmlns:a16="http://schemas.microsoft.com/office/drawing/2014/main" id="{2D998A1D-159D-41B3-1CEC-BD3E8030EE2A}"/>
+              </a:ext>
+            </a:extLst>
+          </p:cNvPr>
+          <p:cNvSpPr>
+            <a:spLocks noGrp="1"/>
+          </p:cNvSpPr>
+          <p:nvPr>
+            <p:ph type="title"/>
+          </p:nvPr>
+        </p:nvSpPr>
+        <p:spPr/>
+        <p:txBody>
+          <a:bodyPr/>
+          <a:lstStyle/>
+          <a:p>
+            <a:endParaRPr lang="ko-KR" altLang="en-US"/>
+          </a:p>
+        </p:txBody>
+      </p:sp>
+      <p:pic>
+        <p:nvPicPr>
+          <p:cNvPr id="7" name="내용 개체 틀 6">
+            <a:extLst>
+              <a:ext uri="{FF2B5EF4-FFF2-40B4-BE49-F238E27FC236}">
+                <a16:creationId xmlns:a16="http://schemas.microsoft.com/office/drawing/2014/main" id="{26DB5318-8192-1B17-D06A-3EA8715B4E89}"/>
+              </a:ext>
+            </a:extLst>
+          </p:cNvPr>
+          <p:cNvPicPr>
+            <a:picLocks noGrp="1" noChangeAspect="1"/>
+          </p:cNvPicPr>
+          <p:nvPr>
+            <p:ph idx="1"/>
+          </p:nvPr>
+        </p:nvPicPr>
+        <p:blipFill>
+          <a:blip r:embed="rId2"/>
+          <a:stretch>
+            <a:fillRect/>
+          </a:stretch>
+        </p:blipFill>
+        <p:spPr bwMode="auto">
+          <a:xfrm>
+            <a:off x="611560" y="155781"/>
+            <a:ext cx="5040560" cy="1924577"/>
+          </a:xfrm>
+          <a:prstGeom prst="rect">
+            <a:avLst/>
+          </a:prstGeom>
+          <a:noFill/>
+          <a:ln>
+            <a:noFill/>
+          </a:ln>
+          <a:extLst>
+            <a:ext uri="{909E8E84-426E-40DD-AFC4-6F175D3DCCD1}">
+              <a14:hiddenFill xmlns:a14="http://schemas.microsoft.com/office/drawing/2010/main">
+                <a:solidFill>
+                  <a:srgbClr val="FFFFFF"/>
+                </a:solidFill>
+              </a14:hiddenFill>
+            </a:ext>
+            <a:ext uri="{91240B29-F687-4F45-9708-019B960494DF}">
+              <a14:hiddenLine xmlns:a14="http://schemas.microsoft.com/office/drawing/2010/main" w="9525">
+                <a:solidFill>
+                  <a:srgbClr val="000000"/>
+                </a:solidFill>
+                <a:miter lim="800000"/>
+                <a:headEnd/>
+                <a:tailEnd/>
+              </a14:hiddenLine>
+            </a:ext>
+          </a:extLst>
+        </p:spPr>
+      </p:pic>
+      <p:sp>
+        <p:nvSpPr>
+          <p:cNvPr id="4" name="날짜 개체 틀 3">
+            <a:extLst>
+              <a:ext uri="{FF2B5EF4-FFF2-40B4-BE49-F238E27FC236}">
+                <a16:creationId xmlns:a16="http://schemas.microsoft.com/office/drawing/2014/main" id="{595418B6-A3EF-9EBB-41B1-9D55157D3F0A}"/>
+              </a:ext>
+            </a:extLst>
+          </p:cNvPr>
+          <p:cNvSpPr>
+            <a:spLocks noGrp="1"/>
+          </p:cNvSpPr>
+          <p:nvPr>
+            <p:ph type="dt" sz="half" idx="10"/>
+          </p:nvPr>
+        </p:nvSpPr>
+        <p:spPr/>
+        <p:txBody>
+          <a:bodyPr/>
+          <a:lstStyle/>
+          <a:p>
+            <a:pPr>
+              <a:defRPr/>
+            </a:pPr>
+            <a:r>
+              <a:rPr lang="en-US" altLang="ko-KR"/>
+              <a:t>2008</a:t>
+            </a:r>
+            <a:r>
+              <a:rPr lang="ko-KR" altLang="en-US"/>
+              <a:t>년</a:t>
+            </a:r>
+            <a:r>
+              <a:rPr lang="en-US" altLang="ko-KR"/>
+              <a:t>2</a:t>
+            </a:r>
+            <a:r>
+              <a:rPr lang="ko-KR" altLang="en-US"/>
+              <a:t>학기 </a:t>
+            </a:r>
+            <a:r>
+              <a:rPr lang="en-US" altLang="ko-KR"/>
+              <a:t>3D</a:t>
+            </a:r>
+            <a:r>
+              <a:rPr lang="ko-KR" altLang="en-US"/>
+              <a:t>게임프로그래밍</a:t>
+            </a:r>
+            <a:r>
+              <a:rPr lang="en-US" altLang="ko-KR"/>
+              <a:t>II </a:t>
+            </a:r>
+            <a:r>
+              <a:rPr lang="ko-KR" altLang="en-US"/>
+              <a:t>담당교수</a:t>
+            </a:r>
+            <a:r>
+              <a:rPr lang="en-US" altLang="ko-KR"/>
+              <a:t>:</a:t>
+            </a:r>
+            <a:r>
+              <a:rPr lang="ko-KR" altLang="en-US"/>
+              <a:t>김영식</a:t>
+            </a:r>
+          </a:p>
+        </p:txBody>
+      </p:sp>
+      <p:sp>
+        <p:nvSpPr>
+          <p:cNvPr id="5" name="슬라이드 번호 개체 틀 4">
+            <a:extLst>
+              <a:ext uri="{FF2B5EF4-FFF2-40B4-BE49-F238E27FC236}">
+                <a16:creationId xmlns:a16="http://schemas.microsoft.com/office/drawing/2014/main" id="{A80963A3-57B7-F09B-5D6A-6899BE8C6F13}"/>
+              </a:ext>
+            </a:extLst>
+          </p:cNvPr>
+          <p:cNvSpPr>
+            <a:spLocks noGrp="1"/>
+          </p:cNvSpPr>
+          <p:nvPr>
+            <p:ph type="sldNum" sz="quarter" idx="12"/>
+          </p:nvPr>
+        </p:nvSpPr>
+        <p:spPr/>
+        <p:txBody>
+          <a:bodyPr/>
+          <a:lstStyle/>
+          <a:p>
+            <a:pPr>
+              <a:defRPr/>
+            </a:pPr>
+            <a:fld id="{A268DA64-E15D-4814-A1DA-86D92D550423}" type="slidenum">
+              <a:rPr lang="ko-KR" altLang="en-US" smtClean="0"/>
+              <a:pPr>
+                <a:defRPr/>
+              </a:pPr>
+              <a:t>17</a:t>
+            </a:fld>
+            <a:endParaRPr lang="ko-KR" altLang="en-US"/>
+          </a:p>
+        </p:txBody>
+      </p:sp>
+      <p:pic>
+        <p:nvPicPr>
+          <p:cNvPr id="9" name="그림 8">
+            <a:extLst>
+              <a:ext uri="{FF2B5EF4-FFF2-40B4-BE49-F238E27FC236}">
+                <a16:creationId xmlns:a16="http://schemas.microsoft.com/office/drawing/2014/main" id="{72ED8CF4-0CAE-6212-7F17-DD3520268F38}"/>
+              </a:ext>
+            </a:extLst>
+          </p:cNvPr>
+          <p:cNvPicPr>
+            <a:picLocks noChangeAspect="1"/>
+          </p:cNvPicPr>
+          <p:nvPr/>
+        </p:nvPicPr>
+        <p:blipFill>
+          <a:blip r:embed="rId3"/>
+          <a:stretch>
+            <a:fillRect/>
+          </a:stretch>
+        </p:blipFill>
+        <p:spPr>
+          <a:xfrm>
+            <a:off x="561999" y="2170750"/>
+            <a:ext cx="4032448" cy="4159718"/>
+          </a:xfrm>
+          <a:prstGeom prst="rect">
+            <a:avLst/>
+          </a:prstGeom>
+        </p:spPr>
+      </p:pic>
+      <p:pic>
+        <p:nvPicPr>
+          <p:cNvPr id="11" name="그림 10">
+            <a:extLst>
+              <a:ext uri="{FF2B5EF4-FFF2-40B4-BE49-F238E27FC236}">
+                <a16:creationId xmlns:a16="http://schemas.microsoft.com/office/drawing/2014/main" id="{9A458237-7BF9-700A-643D-78E107174C09}"/>
+              </a:ext>
+            </a:extLst>
+          </p:cNvPr>
+          <p:cNvPicPr>
+            <a:picLocks noChangeAspect="1"/>
+          </p:cNvPicPr>
+          <p:nvPr/>
+        </p:nvPicPr>
+        <p:blipFill>
+          <a:blip r:embed="rId4"/>
+          <a:stretch>
+            <a:fillRect/>
+          </a:stretch>
+        </p:blipFill>
+        <p:spPr>
+          <a:xfrm>
+            <a:off x="3203848" y="2420888"/>
+            <a:ext cx="5519357" cy="3240360"/>
+          </a:xfrm>
+          <a:prstGeom prst="rect">
+            <a:avLst/>
+          </a:prstGeom>
+        </p:spPr>
+      </p:pic>
+    </p:spTree>
+    <p:extLst>
+      <p:ext uri="{BB962C8B-B14F-4D97-AF65-F5344CB8AC3E}">
+        <p14:creationId xmlns:p14="http://schemas.microsoft.com/office/powerpoint/2010/main" val="724179292"/>
+      </p:ext>
+    </p:extLst>
+  </p:cSld>
+  <p:clrMapOvr>
+    <a:masterClrMapping/>
+  </p:clrMapOvr>
+</p:sld>
+</file>
+
+<file path=ppt/slides/slide18.xml><?xml version="1.0" encoding="utf-8"?>
 <p:sld xmlns:a="http://schemas.openxmlformats.org/drawingml/2006/main" xmlns:r="http://schemas.openxmlformats.org/officeDocument/2006/relationships" xmlns:p="http://schemas.openxmlformats.org/presentationml/2006/main">
   <p:cSld>
     <p:spTree>
@@ -8302,7 +10181,7 @@
               <a:pPr>
                 <a:defRPr/>
               </a:pPr>
-              <a:t>12</a:t>
+              <a:t>18</a:t>
             </a:fld>
             <a:endParaRPr lang="ko-KR" altLang="en-US"/>
           </a:p>
@@ -8312,6 +10191,278 @@
     <p:extLst>
       <p:ext uri="{BB962C8B-B14F-4D97-AF65-F5344CB8AC3E}">
         <p14:creationId xmlns:p14="http://schemas.microsoft.com/office/powerpoint/2010/main" val="516517271"/>
+      </p:ext>
+    </p:extLst>
+  </p:cSld>
+  <p:clrMapOvr>
+    <a:masterClrMapping/>
+  </p:clrMapOvr>
+</p:sld>
+</file>
+
+<file path=ppt/slides/slide19.xml><?xml version="1.0" encoding="utf-8"?>
+<p:sld xmlns:a="http://schemas.openxmlformats.org/drawingml/2006/main" xmlns:r="http://schemas.openxmlformats.org/officeDocument/2006/relationships" xmlns:p="http://schemas.openxmlformats.org/presentationml/2006/main">
+  <p:cSld>
+    <p:spTree>
+      <p:nvGrpSpPr>
+        <p:cNvPr id="1" name=""/>
+        <p:cNvGrpSpPr/>
+        <p:nvPr/>
+      </p:nvGrpSpPr>
+      <p:grpSpPr>
+        <a:xfrm>
+          <a:off x="0" y="0"/>
+          <a:ext cx="0" cy="0"/>
+          <a:chOff x="0" y="0"/>
+          <a:chExt cx="0" cy="0"/>
+        </a:xfrm>
+      </p:grpSpPr>
+      <p:sp>
+        <p:nvSpPr>
+          <p:cNvPr id="2" name="제목 1">
+            <a:extLst>
+              <a:ext uri="{FF2B5EF4-FFF2-40B4-BE49-F238E27FC236}">
+                <a16:creationId xmlns:a16="http://schemas.microsoft.com/office/drawing/2014/main" id="{462DD8B4-67C7-1593-9DE7-94CFBBB1E5DE}"/>
+              </a:ext>
+            </a:extLst>
+          </p:cNvPr>
+          <p:cNvSpPr>
+            <a:spLocks noGrp="1"/>
+          </p:cNvSpPr>
+          <p:nvPr>
+            <p:ph type="title"/>
+          </p:nvPr>
+        </p:nvSpPr>
+        <p:spPr/>
+        <p:txBody>
+          <a:bodyPr/>
+          <a:lstStyle/>
+          <a:p>
+            <a:endParaRPr lang="ko-KR" altLang="en-US" dirty="0"/>
+          </a:p>
+        </p:txBody>
+      </p:sp>
+      <p:pic>
+        <p:nvPicPr>
+          <p:cNvPr id="7" name="내용 개체 틀 6">
+            <a:extLst>
+              <a:ext uri="{FF2B5EF4-FFF2-40B4-BE49-F238E27FC236}">
+                <a16:creationId xmlns:a16="http://schemas.microsoft.com/office/drawing/2014/main" id="{25835E44-1D42-3D5A-A540-F292E9F83FAB}"/>
+              </a:ext>
+            </a:extLst>
+          </p:cNvPr>
+          <p:cNvPicPr>
+            <a:picLocks noGrp="1" noChangeAspect="1"/>
+          </p:cNvPicPr>
+          <p:nvPr>
+            <p:ph idx="1"/>
+          </p:nvPr>
+        </p:nvPicPr>
+        <p:blipFill>
+          <a:blip r:embed="rId2"/>
+          <a:stretch>
+            <a:fillRect/>
+          </a:stretch>
+        </p:blipFill>
+        <p:spPr bwMode="auto">
+          <a:xfrm>
+            <a:off x="395536" y="239547"/>
+            <a:ext cx="8229600" cy="1180617"/>
+          </a:xfrm>
+          <a:prstGeom prst="rect">
+            <a:avLst/>
+          </a:prstGeom>
+          <a:noFill/>
+          <a:ln>
+            <a:noFill/>
+          </a:ln>
+          <a:extLst>
+            <a:ext uri="{909E8E84-426E-40DD-AFC4-6F175D3DCCD1}">
+              <a14:hiddenFill xmlns:a14="http://schemas.microsoft.com/office/drawing/2010/main">
+                <a:solidFill>
+                  <a:srgbClr val="FFFFFF"/>
+                </a:solidFill>
+              </a14:hiddenFill>
+            </a:ext>
+            <a:ext uri="{91240B29-F687-4F45-9708-019B960494DF}">
+              <a14:hiddenLine xmlns:a14="http://schemas.microsoft.com/office/drawing/2010/main" w="9525">
+                <a:solidFill>
+                  <a:srgbClr val="000000"/>
+                </a:solidFill>
+                <a:miter lim="800000"/>
+                <a:headEnd/>
+                <a:tailEnd/>
+              </a14:hiddenLine>
+            </a:ext>
+          </a:extLst>
+        </p:spPr>
+      </p:pic>
+      <p:sp>
+        <p:nvSpPr>
+          <p:cNvPr id="4" name="날짜 개체 틀 3">
+            <a:extLst>
+              <a:ext uri="{FF2B5EF4-FFF2-40B4-BE49-F238E27FC236}">
+                <a16:creationId xmlns:a16="http://schemas.microsoft.com/office/drawing/2014/main" id="{7ACA9EB6-6FD4-7F23-D57C-6F52272EEDB7}"/>
+              </a:ext>
+            </a:extLst>
+          </p:cNvPr>
+          <p:cNvSpPr>
+            <a:spLocks noGrp="1"/>
+          </p:cNvSpPr>
+          <p:nvPr>
+            <p:ph type="dt" sz="half" idx="10"/>
+          </p:nvPr>
+        </p:nvSpPr>
+        <p:spPr/>
+        <p:txBody>
+          <a:bodyPr/>
+          <a:lstStyle/>
+          <a:p>
+            <a:pPr>
+              <a:defRPr/>
+            </a:pPr>
+            <a:r>
+              <a:rPr lang="en-US" altLang="ko-KR"/>
+              <a:t>2008</a:t>
+            </a:r>
+            <a:r>
+              <a:rPr lang="ko-KR" altLang="en-US"/>
+              <a:t>년</a:t>
+            </a:r>
+            <a:r>
+              <a:rPr lang="en-US" altLang="ko-KR"/>
+              <a:t>2</a:t>
+            </a:r>
+            <a:r>
+              <a:rPr lang="ko-KR" altLang="en-US"/>
+              <a:t>학기 </a:t>
+            </a:r>
+            <a:r>
+              <a:rPr lang="en-US" altLang="ko-KR"/>
+              <a:t>3D</a:t>
+            </a:r>
+            <a:r>
+              <a:rPr lang="ko-KR" altLang="en-US"/>
+              <a:t>게임프로그래밍</a:t>
+            </a:r>
+            <a:r>
+              <a:rPr lang="en-US" altLang="ko-KR"/>
+              <a:t>II </a:t>
+            </a:r>
+            <a:r>
+              <a:rPr lang="ko-KR" altLang="en-US"/>
+              <a:t>담당교수</a:t>
+            </a:r>
+            <a:r>
+              <a:rPr lang="en-US" altLang="ko-KR"/>
+              <a:t>:</a:t>
+            </a:r>
+            <a:r>
+              <a:rPr lang="ko-KR" altLang="en-US"/>
+              <a:t>김영식</a:t>
+            </a:r>
+          </a:p>
+        </p:txBody>
+      </p:sp>
+      <p:sp>
+        <p:nvSpPr>
+          <p:cNvPr id="5" name="슬라이드 번호 개체 틀 4">
+            <a:extLst>
+              <a:ext uri="{FF2B5EF4-FFF2-40B4-BE49-F238E27FC236}">
+                <a16:creationId xmlns:a16="http://schemas.microsoft.com/office/drawing/2014/main" id="{50B227E6-6568-23FB-2D54-D6C2D2E55085}"/>
+              </a:ext>
+            </a:extLst>
+          </p:cNvPr>
+          <p:cNvSpPr>
+            <a:spLocks noGrp="1"/>
+          </p:cNvSpPr>
+          <p:nvPr>
+            <p:ph type="sldNum" sz="quarter" idx="12"/>
+          </p:nvPr>
+        </p:nvSpPr>
+        <p:spPr/>
+        <p:txBody>
+          <a:bodyPr/>
+          <a:lstStyle/>
+          <a:p>
+            <a:pPr>
+              <a:defRPr/>
+            </a:pPr>
+            <a:fld id="{A268DA64-E15D-4814-A1DA-86D92D550423}" type="slidenum">
+              <a:rPr lang="ko-KR" altLang="en-US" smtClean="0"/>
+              <a:pPr>
+                <a:defRPr/>
+              </a:pPr>
+              <a:t>19</a:t>
+            </a:fld>
+            <a:endParaRPr lang="ko-KR" altLang="en-US"/>
+          </a:p>
+        </p:txBody>
+      </p:sp>
+      <p:pic>
+        <p:nvPicPr>
+          <p:cNvPr id="9" name="그림 8">
+            <a:extLst>
+              <a:ext uri="{FF2B5EF4-FFF2-40B4-BE49-F238E27FC236}">
+                <a16:creationId xmlns:a16="http://schemas.microsoft.com/office/drawing/2014/main" id="{6CE65B80-5E1B-7E38-9453-1A952EAD88BC}"/>
+              </a:ext>
+            </a:extLst>
+          </p:cNvPr>
+          <p:cNvPicPr>
+            <a:picLocks noChangeAspect="1"/>
+          </p:cNvPicPr>
+          <p:nvPr/>
+        </p:nvPicPr>
+        <p:blipFill>
+          <a:blip r:embed="rId3"/>
+          <a:stretch>
+            <a:fillRect/>
+          </a:stretch>
+        </p:blipFill>
+        <p:spPr>
+          <a:xfrm>
+            <a:off x="539552" y="1703214"/>
+            <a:ext cx="3889487" cy="4304365"/>
+          </a:xfrm>
+          <a:prstGeom prst="rect">
+            <a:avLst/>
+          </a:prstGeom>
+        </p:spPr>
+      </p:pic>
+      <p:pic>
+        <p:nvPicPr>
+          <p:cNvPr id="11" name="그림 10">
+            <a:extLst>
+              <a:ext uri="{FF2B5EF4-FFF2-40B4-BE49-F238E27FC236}">
+                <a16:creationId xmlns:a16="http://schemas.microsoft.com/office/drawing/2014/main" id="{002A3077-6B2D-735F-58B7-76D8399D6535}"/>
+              </a:ext>
+            </a:extLst>
+          </p:cNvPr>
+          <p:cNvPicPr>
+            <a:picLocks noChangeAspect="1"/>
+          </p:cNvPicPr>
+          <p:nvPr/>
+        </p:nvPicPr>
+        <p:blipFill>
+          <a:blip r:embed="rId4"/>
+          <a:stretch>
+            <a:fillRect/>
+          </a:stretch>
+        </p:blipFill>
+        <p:spPr>
+          <a:xfrm>
+            <a:off x="4788024" y="1494012"/>
+            <a:ext cx="3278713" cy="4722767"/>
+          </a:xfrm>
+          <a:prstGeom prst="rect">
+            <a:avLst/>
+          </a:prstGeom>
+        </p:spPr>
+      </p:pic>
+    </p:spTree>
+    <p:extLst>
+      <p:ext uri="{BB962C8B-B14F-4D97-AF65-F5344CB8AC3E}">
+        <p14:creationId xmlns:p14="http://schemas.microsoft.com/office/powerpoint/2010/main" val="4252077980"/>
       </p:ext>
     </p:extLst>
   </p:cSld>
@@ -10213,6 +12364,248 @@
   <p:cSld>
     <p:spTree>
       <p:nvGrpSpPr>
+        <p:cNvPr id="1" name=""/>
+        <p:cNvGrpSpPr/>
+        <p:nvPr/>
+      </p:nvGrpSpPr>
+      <p:grpSpPr>
+        <a:xfrm>
+          <a:off x="0" y="0"/>
+          <a:ext cx="0" cy="0"/>
+          <a:chOff x="0" y="0"/>
+          <a:chExt cx="0" cy="0"/>
+        </a:xfrm>
+      </p:grpSpPr>
+      <p:sp>
+        <p:nvSpPr>
+          <p:cNvPr id="2" name="제목 1">
+            <a:extLst>
+              <a:ext uri="{FF2B5EF4-FFF2-40B4-BE49-F238E27FC236}">
+                <a16:creationId xmlns:a16="http://schemas.microsoft.com/office/drawing/2014/main" id="{7AA02887-B7A7-5FA9-8E3E-04DE5F3D88A5}"/>
+              </a:ext>
+            </a:extLst>
+          </p:cNvPr>
+          <p:cNvSpPr>
+            <a:spLocks noGrp="1"/>
+          </p:cNvSpPr>
+          <p:nvPr>
+            <p:ph type="title"/>
+          </p:nvPr>
+        </p:nvSpPr>
+        <p:spPr/>
+        <p:txBody>
+          <a:bodyPr/>
+          <a:lstStyle/>
+          <a:p>
+            <a:endParaRPr lang="ko-KR" altLang="en-US" dirty="0"/>
+          </a:p>
+        </p:txBody>
+      </p:sp>
+      <p:pic>
+        <p:nvPicPr>
+          <p:cNvPr id="7" name="내용 개체 틀 6">
+            <a:extLst>
+              <a:ext uri="{FF2B5EF4-FFF2-40B4-BE49-F238E27FC236}">
+                <a16:creationId xmlns:a16="http://schemas.microsoft.com/office/drawing/2014/main" id="{45950083-BEF4-932B-9868-14228DEA2AE4}"/>
+              </a:ext>
+            </a:extLst>
+          </p:cNvPr>
+          <p:cNvPicPr>
+            <a:picLocks noGrp="1" noChangeAspect="1"/>
+          </p:cNvPicPr>
+          <p:nvPr>
+            <p:ph idx="1"/>
+          </p:nvPr>
+        </p:nvPicPr>
+        <p:blipFill>
+          <a:blip r:embed="rId2"/>
+          <a:stretch>
+            <a:fillRect/>
+          </a:stretch>
+        </p:blipFill>
+        <p:spPr bwMode="auto">
+          <a:xfrm>
+            <a:off x="539552" y="296815"/>
+            <a:ext cx="8064896" cy="1692025"/>
+          </a:xfrm>
+          <a:prstGeom prst="rect">
+            <a:avLst/>
+          </a:prstGeom>
+          <a:noFill/>
+          <a:ln>
+            <a:noFill/>
+          </a:ln>
+          <a:extLst>
+            <a:ext uri="{909E8E84-426E-40DD-AFC4-6F175D3DCCD1}">
+              <a14:hiddenFill xmlns:a14="http://schemas.microsoft.com/office/drawing/2010/main">
+                <a:solidFill>
+                  <a:srgbClr val="FFFFFF"/>
+                </a:solidFill>
+              </a14:hiddenFill>
+            </a:ext>
+            <a:ext uri="{91240B29-F687-4F45-9708-019B960494DF}">
+              <a14:hiddenLine xmlns:a14="http://schemas.microsoft.com/office/drawing/2010/main" w="9525">
+                <a:solidFill>
+                  <a:srgbClr val="000000"/>
+                </a:solidFill>
+                <a:miter lim="800000"/>
+                <a:headEnd/>
+                <a:tailEnd/>
+              </a14:hiddenLine>
+            </a:ext>
+          </a:extLst>
+        </p:spPr>
+      </p:pic>
+      <p:sp>
+        <p:nvSpPr>
+          <p:cNvPr id="4" name="날짜 개체 틀 3">
+            <a:extLst>
+              <a:ext uri="{FF2B5EF4-FFF2-40B4-BE49-F238E27FC236}">
+                <a16:creationId xmlns:a16="http://schemas.microsoft.com/office/drawing/2014/main" id="{396F0174-3598-BEDB-EA46-1D0E030244D0}"/>
+              </a:ext>
+            </a:extLst>
+          </p:cNvPr>
+          <p:cNvSpPr>
+            <a:spLocks noGrp="1"/>
+          </p:cNvSpPr>
+          <p:nvPr>
+            <p:ph type="dt" sz="half" idx="10"/>
+          </p:nvPr>
+        </p:nvSpPr>
+        <p:spPr/>
+        <p:txBody>
+          <a:bodyPr/>
+          <a:lstStyle/>
+          <a:p>
+            <a:pPr>
+              <a:defRPr/>
+            </a:pPr>
+            <a:r>
+              <a:rPr lang="en-US" altLang="ko-KR"/>
+              <a:t>2008</a:t>
+            </a:r>
+            <a:r>
+              <a:rPr lang="ko-KR" altLang="en-US"/>
+              <a:t>년</a:t>
+            </a:r>
+            <a:r>
+              <a:rPr lang="en-US" altLang="ko-KR"/>
+              <a:t>2</a:t>
+            </a:r>
+            <a:r>
+              <a:rPr lang="ko-KR" altLang="en-US"/>
+              <a:t>학기 </a:t>
+            </a:r>
+            <a:r>
+              <a:rPr lang="en-US" altLang="ko-KR"/>
+              <a:t>3D</a:t>
+            </a:r>
+            <a:r>
+              <a:rPr lang="ko-KR" altLang="en-US"/>
+              <a:t>게임프로그래밍</a:t>
+            </a:r>
+            <a:r>
+              <a:rPr lang="en-US" altLang="ko-KR"/>
+              <a:t>II </a:t>
+            </a:r>
+            <a:r>
+              <a:rPr lang="ko-KR" altLang="en-US"/>
+              <a:t>담당교수</a:t>
+            </a:r>
+            <a:r>
+              <a:rPr lang="en-US" altLang="ko-KR"/>
+              <a:t>:</a:t>
+            </a:r>
+            <a:r>
+              <a:rPr lang="ko-KR" altLang="en-US"/>
+              <a:t>김영식</a:t>
+            </a:r>
+          </a:p>
+        </p:txBody>
+      </p:sp>
+      <p:sp>
+        <p:nvSpPr>
+          <p:cNvPr id="5" name="슬라이드 번호 개체 틀 4">
+            <a:extLst>
+              <a:ext uri="{FF2B5EF4-FFF2-40B4-BE49-F238E27FC236}">
+                <a16:creationId xmlns:a16="http://schemas.microsoft.com/office/drawing/2014/main" id="{6D5A829A-C19F-C769-3420-0DDD554D4BDB}"/>
+              </a:ext>
+            </a:extLst>
+          </p:cNvPr>
+          <p:cNvSpPr>
+            <a:spLocks noGrp="1"/>
+          </p:cNvSpPr>
+          <p:nvPr>
+            <p:ph type="sldNum" sz="quarter" idx="12"/>
+          </p:nvPr>
+        </p:nvSpPr>
+        <p:spPr/>
+        <p:txBody>
+          <a:bodyPr/>
+          <a:lstStyle/>
+          <a:p>
+            <a:pPr>
+              <a:defRPr/>
+            </a:pPr>
+            <a:fld id="{A268DA64-E15D-4814-A1DA-86D92D550423}" type="slidenum">
+              <a:rPr lang="ko-KR" altLang="en-US" smtClean="0"/>
+              <a:pPr>
+                <a:defRPr/>
+              </a:pPr>
+              <a:t>6</a:t>
+            </a:fld>
+            <a:endParaRPr lang="ko-KR" altLang="en-US"/>
+          </a:p>
+        </p:txBody>
+      </p:sp>
+      <p:pic>
+        <p:nvPicPr>
+          <p:cNvPr id="9" name="그림 8">
+            <a:extLst>
+              <a:ext uri="{FF2B5EF4-FFF2-40B4-BE49-F238E27FC236}">
+                <a16:creationId xmlns:a16="http://schemas.microsoft.com/office/drawing/2014/main" id="{5B8F9DDE-E595-957A-D135-6C9C965B6C4E}"/>
+              </a:ext>
+            </a:extLst>
+          </p:cNvPr>
+          <p:cNvPicPr>
+            <a:picLocks noChangeAspect="1"/>
+          </p:cNvPicPr>
+          <p:nvPr/>
+        </p:nvPicPr>
+        <p:blipFill>
+          <a:blip r:embed="rId3"/>
+          <a:stretch>
+            <a:fillRect/>
+          </a:stretch>
+        </p:blipFill>
+        <p:spPr>
+          <a:xfrm>
+            <a:off x="4608450" y="2011017"/>
+            <a:ext cx="3016959" cy="4432027"/>
+          </a:xfrm>
+          <a:prstGeom prst="rect">
+            <a:avLst/>
+          </a:prstGeom>
+        </p:spPr>
+      </p:pic>
+    </p:spTree>
+    <p:extLst>
+      <p:ext uri="{BB962C8B-B14F-4D97-AF65-F5344CB8AC3E}">
+        <p14:creationId xmlns:p14="http://schemas.microsoft.com/office/powerpoint/2010/main" val="3159478411"/>
+      </p:ext>
+    </p:extLst>
+  </p:cSld>
+  <p:clrMapOvr>
+    <a:masterClrMapping/>
+  </p:clrMapOvr>
+</p:sld>
+</file>
+
+<file path=ppt/slides/slide7.xml><?xml version="1.0" encoding="utf-8"?>
+<p:sld xmlns:a="http://schemas.openxmlformats.org/drawingml/2006/main" xmlns:r="http://schemas.openxmlformats.org/officeDocument/2006/relationships" xmlns:p="http://schemas.openxmlformats.org/presentationml/2006/main">
+  <p:cSld>
+    <p:spTree>
+      <p:nvGrpSpPr>
         <p:cNvPr id="1" name="">
           <a:extLst>
             <a:ext uri="{FF2B5EF4-FFF2-40B4-BE49-F238E27FC236}">
@@ -10578,7 +12971,7 @@
               <a:pPr>
                 <a:defRPr/>
               </a:pPr>
-              <a:t>6</a:t>
+              <a:t>7</a:t>
             </a:fld>
             <a:endParaRPr lang="ko-KR" altLang="en-US"/>
           </a:p>
@@ -10627,7 +13020,249 @@
 </p:sld>
 </file>
 
-<file path=ppt/slides/slide7.xml><?xml version="1.0" encoding="utf-8"?>
+<file path=ppt/slides/slide8.xml><?xml version="1.0" encoding="utf-8"?>
+<p:sld xmlns:a="http://schemas.openxmlformats.org/drawingml/2006/main" xmlns:r="http://schemas.openxmlformats.org/officeDocument/2006/relationships" xmlns:p="http://schemas.openxmlformats.org/presentationml/2006/main">
+  <p:cSld>
+    <p:spTree>
+      <p:nvGrpSpPr>
+        <p:cNvPr id="1" name=""/>
+        <p:cNvGrpSpPr/>
+        <p:nvPr/>
+      </p:nvGrpSpPr>
+      <p:grpSpPr>
+        <a:xfrm>
+          <a:off x="0" y="0"/>
+          <a:ext cx="0" cy="0"/>
+          <a:chOff x="0" y="0"/>
+          <a:chExt cx="0" cy="0"/>
+        </a:xfrm>
+      </p:grpSpPr>
+      <p:sp>
+        <p:nvSpPr>
+          <p:cNvPr id="2" name="제목 1">
+            <a:extLst>
+              <a:ext uri="{FF2B5EF4-FFF2-40B4-BE49-F238E27FC236}">
+                <a16:creationId xmlns:a16="http://schemas.microsoft.com/office/drawing/2014/main" id="{0BC1C441-3A75-8510-CC27-25BD88E06A16}"/>
+              </a:ext>
+            </a:extLst>
+          </p:cNvPr>
+          <p:cNvSpPr>
+            <a:spLocks noGrp="1"/>
+          </p:cNvSpPr>
+          <p:nvPr>
+            <p:ph type="title"/>
+          </p:nvPr>
+        </p:nvSpPr>
+        <p:spPr/>
+        <p:txBody>
+          <a:bodyPr/>
+          <a:lstStyle/>
+          <a:p>
+            <a:endParaRPr lang="ko-KR" altLang="en-US"/>
+          </a:p>
+        </p:txBody>
+      </p:sp>
+      <p:pic>
+        <p:nvPicPr>
+          <p:cNvPr id="7" name="내용 개체 틀 6">
+            <a:extLst>
+              <a:ext uri="{FF2B5EF4-FFF2-40B4-BE49-F238E27FC236}">
+                <a16:creationId xmlns:a16="http://schemas.microsoft.com/office/drawing/2014/main" id="{1053C13C-D3F5-8FF2-21DF-DA6CC1D24006}"/>
+              </a:ext>
+            </a:extLst>
+          </p:cNvPr>
+          <p:cNvPicPr>
+            <a:picLocks noGrp="1" noChangeAspect="1"/>
+          </p:cNvPicPr>
+          <p:nvPr>
+            <p:ph idx="1"/>
+          </p:nvPr>
+        </p:nvPicPr>
+        <p:blipFill>
+          <a:blip r:embed="rId2"/>
+          <a:stretch>
+            <a:fillRect/>
+          </a:stretch>
+        </p:blipFill>
+        <p:spPr bwMode="auto">
+          <a:xfrm>
+            <a:off x="457200" y="378248"/>
+            <a:ext cx="8229600" cy="661126"/>
+          </a:xfrm>
+          <a:prstGeom prst="rect">
+            <a:avLst/>
+          </a:prstGeom>
+          <a:noFill/>
+          <a:ln>
+            <a:noFill/>
+          </a:ln>
+          <a:extLst>
+            <a:ext uri="{909E8E84-426E-40DD-AFC4-6F175D3DCCD1}">
+              <a14:hiddenFill xmlns:a14="http://schemas.microsoft.com/office/drawing/2010/main">
+                <a:solidFill>
+                  <a:srgbClr val="FFFFFF"/>
+                </a:solidFill>
+              </a14:hiddenFill>
+            </a:ext>
+            <a:ext uri="{91240B29-F687-4F45-9708-019B960494DF}">
+              <a14:hiddenLine xmlns:a14="http://schemas.microsoft.com/office/drawing/2010/main" w="9525">
+                <a:solidFill>
+                  <a:srgbClr val="000000"/>
+                </a:solidFill>
+                <a:miter lim="800000"/>
+                <a:headEnd/>
+                <a:tailEnd/>
+              </a14:hiddenLine>
+            </a:ext>
+          </a:extLst>
+        </p:spPr>
+      </p:pic>
+      <p:sp>
+        <p:nvSpPr>
+          <p:cNvPr id="4" name="날짜 개체 틀 3">
+            <a:extLst>
+              <a:ext uri="{FF2B5EF4-FFF2-40B4-BE49-F238E27FC236}">
+                <a16:creationId xmlns:a16="http://schemas.microsoft.com/office/drawing/2014/main" id="{3B75C02F-6213-F236-122D-3A1F0E6E7293}"/>
+              </a:ext>
+            </a:extLst>
+          </p:cNvPr>
+          <p:cNvSpPr>
+            <a:spLocks noGrp="1"/>
+          </p:cNvSpPr>
+          <p:nvPr>
+            <p:ph type="dt" sz="half" idx="10"/>
+          </p:nvPr>
+        </p:nvSpPr>
+        <p:spPr/>
+        <p:txBody>
+          <a:bodyPr/>
+          <a:lstStyle/>
+          <a:p>
+            <a:pPr>
+              <a:defRPr/>
+            </a:pPr>
+            <a:r>
+              <a:rPr lang="en-US" altLang="ko-KR"/>
+              <a:t>2008</a:t>
+            </a:r>
+            <a:r>
+              <a:rPr lang="ko-KR" altLang="en-US"/>
+              <a:t>년</a:t>
+            </a:r>
+            <a:r>
+              <a:rPr lang="en-US" altLang="ko-KR"/>
+              <a:t>2</a:t>
+            </a:r>
+            <a:r>
+              <a:rPr lang="ko-KR" altLang="en-US"/>
+              <a:t>학기 </a:t>
+            </a:r>
+            <a:r>
+              <a:rPr lang="en-US" altLang="ko-KR"/>
+              <a:t>3D</a:t>
+            </a:r>
+            <a:r>
+              <a:rPr lang="ko-KR" altLang="en-US"/>
+              <a:t>게임프로그래밍</a:t>
+            </a:r>
+            <a:r>
+              <a:rPr lang="en-US" altLang="ko-KR"/>
+              <a:t>II </a:t>
+            </a:r>
+            <a:r>
+              <a:rPr lang="ko-KR" altLang="en-US"/>
+              <a:t>담당교수</a:t>
+            </a:r>
+            <a:r>
+              <a:rPr lang="en-US" altLang="ko-KR"/>
+              <a:t>:</a:t>
+            </a:r>
+            <a:r>
+              <a:rPr lang="ko-KR" altLang="en-US"/>
+              <a:t>김영식</a:t>
+            </a:r>
+          </a:p>
+        </p:txBody>
+      </p:sp>
+      <p:sp>
+        <p:nvSpPr>
+          <p:cNvPr id="5" name="슬라이드 번호 개체 틀 4">
+            <a:extLst>
+              <a:ext uri="{FF2B5EF4-FFF2-40B4-BE49-F238E27FC236}">
+                <a16:creationId xmlns:a16="http://schemas.microsoft.com/office/drawing/2014/main" id="{E6CE5A28-4CD8-76C1-9E36-1FE3FA1B79A2}"/>
+              </a:ext>
+            </a:extLst>
+          </p:cNvPr>
+          <p:cNvSpPr>
+            <a:spLocks noGrp="1"/>
+          </p:cNvSpPr>
+          <p:nvPr>
+            <p:ph type="sldNum" sz="quarter" idx="12"/>
+          </p:nvPr>
+        </p:nvSpPr>
+        <p:spPr/>
+        <p:txBody>
+          <a:bodyPr/>
+          <a:lstStyle/>
+          <a:p>
+            <a:pPr>
+              <a:defRPr/>
+            </a:pPr>
+            <a:fld id="{A268DA64-E15D-4814-A1DA-86D92D550423}" type="slidenum">
+              <a:rPr lang="ko-KR" altLang="en-US" smtClean="0"/>
+              <a:pPr>
+                <a:defRPr/>
+              </a:pPr>
+              <a:t>8</a:t>
+            </a:fld>
+            <a:endParaRPr lang="ko-KR" altLang="en-US"/>
+          </a:p>
+        </p:txBody>
+      </p:sp>
+      <p:pic>
+        <p:nvPicPr>
+          <p:cNvPr id="9" name="그림 8">
+            <a:extLst>
+              <a:ext uri="{FF2B5EF4-FFF2-40B4-BE49-F238E27FC236}">
+                <a16:creationId xmlns:a16="http://schemas.microsoft.com/office/drawing/2014/main" id="{D920F34B-BBB5-DC42-7A77-02F18A70957D}"/>
+              </a:ext>
+            </a:extLst>
+          </p:cNvPr>
+          <p:cNvPicPr>
+            <a:picLocks noChangeAspect="1"/>
+          </p:cNvPicPr>
+          <p:nvPr/>
+        </p:nvPicPr>
+        <p:blipFill>
+          <a:blip r:embed="rId3"/>
+          <a:stretch>
+            <a:fillRect/>
+          </a:stretch>
+        </p:blipFill>
+        <p:spPr>
+          <a:xfrm>
+            <a:off x="1115616" y="1113871"/>
+            <a:ext cx="3028161" cy="5157192"/>
+          </a:xfrm>
+          <a:prstGeom prst="rect">
+            <a:avLst/>
+          </a:prstGeom>
+        </p:spPr>
+      </p:pic>
+    </p:spTree>
+    <p:extLst>
+      <p:ext uri="{BB962C8B-B14F-4D97-AF65-F5344CB8AC3E}">
+        <p14:creationId xmlns:p14="http://schemas.microsoft.com/office/powerpoint/2010/main" val="282588567"/>
+      </p:ext>
+    </p:extLst>
+  </p:cSld>
+  <p:clrMapOvr>
+    <a:masterClrMapping/>
+  </p:clrMapOvr>
+</p:sld>
+</file>
+
+<file path=ppt/slides/slide9.xml><?xml version="1.0" encoding="utf-8"?>
 <p:sld xmlns:a="http://schemas.openxmlformats.org/drawingml/2006/main" xmlns:r="http://schemas.openxmlformats.org/officeDocument/2006/relationships" xmlns:p="http://schemas.openxmlformats.org/presentationml/2006/main">
   <p:cSld>
     <p:spTree>
@@ -10829,7 +13464,7 @@
               <a:pPr>
                 <a:defRPr/>
               </a:pPr>
-              <a:t>7</a:t>
+              <a:t>9</a:t>
             </a:fld>
             <a:endParaRPr lang="ko-KR" altLang="en-US"/>
           </a:p>
@@ -10869,850 +13504,6 @@
     <p:extLst>
       <p:ext uri="{BB962C8B-B14F-4D97-AF65-F5344CB8AC3E}">
         <p14:creationId xmlns:p14="http://schemas.microsoft.com/office/powerpoint/2010/main" val="2689540587"/>
-      </p:ext>
-    </p:extLst>
-  </p:cSld>
-  <p:clrMapOvr>
-    <a:masterClrMapping/>
-  </p:clrMapOvr>
-</p:sld>
-</file>
-
-<file path=ppt/slides/slide8.xml><?xml version="1.0" encoding="utf-8"?>
-<p:sld xmlns:a="http://schemas.openxmlformats.org/drawingml/2006/main" xmlns:r="http://schemas.openxmlformats.org/officeDocument/2006/relationships" xmlns:p="http://schemas.openxmlformats.org/presentationml/2006/main">
-  <p:cSld>
-    <p:spTree>
-      <p:nvGrpSpPr>
-        <p:cNvPr id="1" name="">
-          <a:extLst>
-            <a:ext uri="{FF2B5EF4-FFF2-40B4-BE49-F238E27FC236}">
-              <a16:creationId xmlns:a16="http://schemas.microsoft.com/office/drawing/2014/main" id="{BB2182D6-7C3A-1450-0957-0736228992F8}"/>
-            </a:ext>
-          </a:extLst>
-        </p:cNvPr>
-        <p:cNvGrpSpPr/>
-        <p:nvPr/>
-      </p:nvGrpSpPr>
-      <p:grpSpPr>
-        <a:xfrm>
-          <a:off x="0" y="0"/>
-          <a:ext cx="0" cy="0"/>
-          <a:chOff x="0" y="0"/>
-          <a:chExt cx="0" cy="0"/>
-        </a:xfrm>
-      </p:grpSpPr>
-      <p:sp>
-        <p:nvSpPr>
-          <p:cNvPr id="2" name="제목 1">
-            <a:extLst>
-              <a:ext uri="{FF2B5EF4-FFF2-40B4-BE49-F238E27FC236}">
-                <a16:creationId xmlns:a16="http://schemas.microsoft.com/office/drawing/2014/main" id="{00FC0AAC-B616-D4EC-909C-ECC3F2A8B843}"/>
-              </a:ext>
-            </a:extLst>
-          </p:cNvPr>
-          <p:cNvSpPr>
-            <a:spLocks noGrp="1"/>
-          </p:cNvSpPr>
-          <p:nvPr>
-            <p:ph type="title"/>
-          </p:nvPr>
-        </p:nvSpPr>
-        <p:spPr/>
-        <p:txBody>
-          <a:bodyPr/>
-          <a:lstStyle/>
-          <a:p>
-            <a:r>
-              <a:rPr lang="en-US" altLang="ko-KR" sz="2800" dirty="0"/>
-              <a:t>4. </a:t>
-            </a:r>
-            <a:r>
-              <a:rPr lang="ko-KR" altLang="en-US" sz="2800" dirty="0"/>
-              <a:t>비밀지도</a:t>
-            </a:r>
-            <a:r>
-              <a:rPr lang="en-US" altLang="ko-KR" sz="2800" dirty="0"/>
-              <a:t>(Programmers, </a:t>
-            </a:r>
-            <a:r>
-              <a:rPr lang="ko-KR" altLang="en-US" sz="2800" dirty="0"/>
-              <a:t>구현</a:t>
-            </a:r>
-            <a:r>
-              <a:rPr lang="en-US" altLang="ko-KR" sz="2800" dirty="0"/>
-              <a:t>) </a:t>
-            </a:r>
-            <a:br>
-              <a:rPr lang="en-US" altLang="ko-KR" sz="2800" dirty="0"/>
-            </a:br>
-            <a:r>
-              <a:rPr lang="en-US" altLang="ko-KR" sz="2000" dirty="0"/>
-              <a:t>https://school.programmers.co.kr/learn/courses/30/lessons/17681</a:t>
-            </a:r>
-            <a:endParaRPr lang="ko-KR" altLang="en-US" sz="2000" dirty="0"/>
-          </a:p>
-        </p:txBody>
-      </p:sp>
-      <p:sp>
-        <p:nvSpPr>
-          <p:cNvPr id="5" name="슬라이드 번호 개체 틀 4">
-            <a:extLst>
-              <a:ext uri="{FF2B5EF4-FFF2-40B4-BE49-F238E27FC236}">
-                <a16:creationId xmlns:a16="http://schemas.microsoft.com/office/drawing/2014/main" id="{81099AAD-C6EA-CB4B-F77E-8434C7D5EADC}"/>
-              </a:ext>
-            </a:extLst>
-          </p:cNvPr>
-          <p:cNvSpPr>
-            <a:spLocks noGrp="1"/>
-          </p:cNvSpPr>
-          <p:nvPr>
-            <p:ph type="sldNum" sz="quarter" idx="12"/>
-          </p:nvPr>
-        </p:nvSpPr>
-        <p:spPr/>
-        <p:txBody>
-          <a:bodyPr/>
-          <a:lstStyle/>
-          <a:p>
-            <a:pPr>
-              <a:defRPr/>
-            </a:pPr>
-            <a:fld id="{A268DA64-E15D-4814-A1DA-86D92D550423}" type="slidenum">
-              <a:rPr lang="ko-KR" altLang="en-US" smtClean="0"/>
-              <a:pPr>
-                <a:defRPr/>
-              </a:pPr>
-              <a:t>8</a:t>
-            </a:fld>
-            <a:endParaRPr lang="ko-KR" altLang="en-US"/>
-          </a:p>
-        </p:txBody>
-      </p:sp>
-      <p:sp>
-        <p:nvSpPr>
-          <p:cNvPr id="3" name="내용 개체 틀 2">
-            <a:extLst>
-              <a:ext uri="{FF2B5EF4-FFF2-40B4-BE49-F238E27FC236}">
-                <a16:creationId xmlns:a16="http://schemas.microsoft.com/office/drawing/2014/main" id="{858C86E8-5349-F7B3-AFB6-B10A83FC024F}"/>
-              </a:ext>
-            </a:extLst>
-          </p:cNvPr>
-          <p:cNvSpPr>
-            <a:spLocks noGrp="1"/>
-          </p:cNvSpPr>
-          <p:nvPr>
-            <p:ph idx="1"/>
-          </p:nvPr>
-        </p:nvSpPr>
-        <p:spPr>
-          <a:xfrm>
-            <a:off x="457200" y="1340768"/>
-            <a:ext cx="8229600" cy="4785395"/>
-          </a:xfrm>
-        </p:spPr>
-        <p:txBody>
-          <a:bodyPr/>
-          <a:lstStyle/>
-          <a:p>
-            <a:pPr algn="just"/>
-            <a:r>
-              <a:rPr lang="ko-KR" altLang="en-US" sz="1800" b="0" i="0" dirty="0">
-                <a:effectLst/>
-                <a:latin typeface="Open Sans" panose="020F0502020204030204" pitchFamily="34" charset="0"/>
-              </a:rPr>
-              <a:t>지도는 한 변의 길이가 </a:t>
-            </a:r>
-            <a:r>
-              <a:rPr lang="en-US" altLang="ko-KR" sz="1800" b="0" i="0" dirty="0">
-                <a:effectLst/>
-                <a:latin typeface="Open Sans" panose="020F0502020204030204" pitchFamily="34" charset="0"/>
-              </a:rPr>
-              <a:t>n</a:t>
-            </a:r>
-            <a:r>
-              <a:rPr lang="ko-KR" altLang="en-US" sz="1800" b="0" i="0" dirty="0">
-                <a:effectLst/>
-                <a:latin typeface="Open Sans" panose="020F0502020204030204" pitchFamily="34" charset="0"/>
-              </a:rPr>
-              <a:t>인 정사각형 배열 형태로</a:t>
-            </a:r>
-            <a:r>
-              <a:rPr lang="en-US" altLang="ko-KR" sz="1800" b="0" i="0" dirty="0">
-                <a:effectLst/>
-                <a:latin typeface="Open Sans" panose="020F0502020204030204" pitchFamily="34" charset="0"/>
-              </a:rPr>
-              <a:t>, </a:t>
-            </a:r>
-            <a:r>
-              <a:rPr lang="ko-KR" altLang="en-US" sz="1800" b="0" i="0" dirty="0">
-                <a:effectLst/>
-                <a:latin typeface="Open Sans" panose="020F0502020204030204" pitchFamily="34" charset="0"/>
-              </a:rPr>
-              <a:t>각 칸은 </a:t>
-            </a:r>
-            <a:r>
-              <a:rPr lang="en-US" altLang="ko-KR" sz="1800" b="0" i="0" dirty="0">
-                <a:effectLst/>
-                <a:latin typeface="Open Sans" panose="020F0502020204030204" pitchFamily="34" charset="0"/>
-              </a:rPr>
-              <a:t>"</a:t>
-            </a:r>
-            <a:r>
-              <a:rPr lang="ko-KR" altLang="en-US" sz="1800" b="0" i="0" dirty="0">
-                <a:effectLst/>
-                <a:latin typeface="Open Sans" panose="020F0502020204030204" pitchFamily="34" charset="0"/>
-              </a:rPr>
-              <a:t>공백</a:t>
-            </a:r>
-            <a:r>
-              <a:rPr lang="en-US" altLang="ko-KR" sz="1800" b="0" i="0" dirty="0">
-                <a:effectLst/>
-                <a:latin typeface="Open Sans" panose="020F0502020204030204" pitchFamily="34" charset="0"/>
-              </a:rPr>
-              <a:t>"(" ") </a:t>
-            </a:r>
-            <a:r>
-              <a:rPr lang="ko-KR" altLang="en-US" sz="1800" b="0" i="0" dirty="0">
-                <a:effectLst/>
-                <a:latin typeface="Open Sans" panose="020F0502020204030204" pitchFamily="34" charset="0"/>
-              </a:rPr>
-              <a:t>또는 </a:t>
-            </a:r>
-            <a:r>
-              <a:rPr lang="en-US" altLang="ko-KR" sz="1800" b="0" i="0" dirty="0">
-                <a:effectLst/>
-                <a:latin typeface="Open Sans" panose="020F0502020204030204" pitchFamily="34" charset="0"/>
-              </a:rPr>
-              <a:t>"</a:t>
-            </a:r>
-            <a:r>
-              <a:rPr lang="ko-KR" altLang="en-US" sz="1800" b="0" i="0" dirty="0">
-                <a:effectLst/>
-                <a:latin typeface="Open Sans" panose="020F0502020204030204" pitchFamily="34" charset="0"/>
-              </a:rPr>
-              <a:t>벽</a:t>
-            </a:r>
-            <a:r>
-              <a:rPr lang="en-US" altLang="ko-KR" sz="1800" b="0" i="0" dirty="0">
-                <a:effectLst/>
-                <a:latin typeface="Open Sans" panose="020F0502020204030204" pitchFamily="34" charset="0"/>
-              </a:rPr>
-              <a:t>"("#") </a:t>
-            </a:r>
-            <a:r>
-              <a:rPr lang="ko-KR" altLang="en-US" sz="1800" b="0" i="0" dirty="0">
-                <a:effectLst/>
-                <a:latin typeface="Open Sans" panose="020F0502020204030204" pitchFamily="34" charset="0"/>
-              </a:rPr>
-              <a:t>두 종류로 이루어져 있다</a:t>
-            </a:r>
-            <a:r>
-              <a:rPr lang="en-US" altLang="ko-KR" sz="1800" b="0" i="0" dirty="0">
-                <a:effectLst/>
-                <a:latin typeface="Open Sans" panose="020F0502020204030204" pitchFamily="34" charset="0"/>
-              </a:rPr>
-              <a:t>.</a:t>
-            </a:r>
-          </a:p>
-          <a:p>
-            <a:pPr algn="just"/>
-            <a:r>
-              <a:rPr lang="ko-KR" altLang="en-US" sz="1800" b="0" i="0" dirty="0">
-                <a:effectLst/>
-                <a:latin typeface="Open Sans" panose="020F0502020204030204" pitchFamily="34" charset="0"/>
-              </a:rPr>
-              <a:t>전체 지도는 두 장의 지도를 겹쳐서 얻을 수 있다</a:t>
-            </a:r>
-            <a:r>
-              <a:rPr lang="en-US" altLang="ko-KR" sz="1800" b="0" i="0" dirty="0">
-                <a:effectLst/>
-                <a:latin typeface="Open Sans" panose="020F0502020204030204" pitchFamily="34" charset="0"/>
-              </a:rPr>
-              <a:t>. </a:t>
-            </a:r>
-            <a:r>
-              <a:rPr lang="ko-KR" altLang="en-US" sz="1800" b="0" i="0" dirty="0">
-                <a:effectLst/>
-                <a:latin typeface="Open Sans" panose="020F0502020204030204" pitchFamily="34" charset="0"/>
-              </a:rPr>
-              <a:t>각각 </a:t>
-            </a:r>
-            <a:r>
-              <a:rPr lang="en-US" altLang="ko-KR" sz="1800" b="0" i="0" dirty="0">
-                <a:effectLst/>
-                <a:latin typeface="Open Sans" panose="020F0502020204030204" pitchFamily="34" charset="0"/>
-              </a:rPr>
-              <a:t>"</a:t>
-            </a:r>
-            <a:r>
-              <a:rPr lang="ko-KR" altLang="en-US" sz="1800" b="0" i="0" dirty="0">
-                <a:effectLst/>
-                <a:latin typeface="Open Sans" panose="020F0502020204030204" pitchFamily="34" charset="0"/>
-              </a:rPr>
-              <a:t>지도 </a:t>
-            </a:r>
-            <a:r>
-              <a:rPr lang="en-US" altLang="ko-KR" sz="1800" b="0" i="0" dirty="0">
-                <a:effectLst/>
-                <a:latin typeface="Open Sans" panose="020F0502020204030204" pitchFamily="34" charset="0"/>
-              </a:rPr>
-              <a:t>1"</a:t>
-            </a:r>
-            <a:r>
-              <a:rPr lang="ko-KR" altLang="en-US" sz="1800" b="0" i="0" dirty="0">
-                <a:effectLst/>
-                <a:latin typeface="Open Sans" panose="020F0502020204030204" pitchFamily="34" charset="0"/>
-              </a:rPr>
-              <a:t>과 </a:t>
-            </a:r>
-            <a:r>
-              <a:rPr lang="en-US" altLang="ko-KR" sz="1800" b="0" i="0" dirty="0">
-                <a:effectLst/>
-                <a:latin typeface="Open Sans" panose="020F0502020204030204" pitchFamily="34" charset="0"/>
-              </a:rPr>
-              <a:t>"</a:t>
-            </a:r>
-            <a:r>
-              <a:rPr lang="ko-KR" altLang="en-US" sz="1800" b="0" i="0" dirty="0">
-                <a:effectLst/>
-                <a:latin typeface="Open Sans" panose="020F0502020204030204" pitchFamily="34" charset="0"/>
-              </a:rPr>
-              <a:t>지도 </a:t>
-            </a:r>
-            <a:r>
-              <a:rPr lang="en-US" altLang="ko-KR" sz="1800" b="0" i="0" dirty="0">
-                <a:effectLst/>
-                <a:latin typeface="Open Sans" panose="020F0502020204030204" pitchFamily="34" charset="0"/>
-              </a:rPr>
-              <a:t>2"</a:t>
-            </a:r>
-            <a:r>
-              <a:rPr lang="ko-KR" altLang="en-US" sz="1800" b="0" i="0" dirty="0">
-                <a:effectLst/>
-                <a:latin typeface="Open Sans" panose="020F0502020204030204" pitchFamily="34" charset="0"/>
-              </a:rPr>
-              <a:t>라고 하자</a:t>
-            </a:r>
-            <a:r>
-              <a:rPr lang="en-US" altLang="ko-KR" sz="1800" b="0" i="0" dirty="0">
-                <a:effectLst/>
-                <a:latin typeface="Open Sans" panose="020F0502020204030204" pitchFamily="34" charset="0"/>
-              </a:rPr>
-              <a:t>. </a:t>
-            </a:r>
-            <a:r>
-              <a:rPr lang="ko-KR" altLang="en-US" sz="1800" b="0" i="0" dirty="0">
-                <a:effectLst/>
-                <a:latin typeface="Open Sans" panose="020F0502020204030204" pitchFamily="34" charset="0"/>
-              </a:rPr>
-              <a:t>지도 </a:t>
-            </a:r>
-            <a:r>
-              <a:rPr lang="en-US" altLang="ko-KR" sz="1800" b="0" i="0" dirty="0">
-                <a:effectLst/>
-                <a:latin typeface="Open Sans" panose="020F0502020204030204" pitchFamily="34" charset="0"/>
-              </a:rPr>
-              <a:t>1 </a:t>
-            </a:r>
-            <a:r>
-              <a:rPr lang="ko-KR" altLang="en-US" sz="1800" b="0" i="0" dirty="0">
-                <a:effectLst/>
-                <a:latin typeface="Open Sans" panose="020F0502020204030204" pitchFamily="34" charset="0"/>
-              </a:rPr>
-              <a:t>또는 지도 </a:t>
-            </a:r>
-            <a:r>
-              <a:rPr lang="en-US" altLang="ko-KR" sz="1800" b="0" i="0" dirty="0">
-                <a:effectLst/>
-                <a:latin typeface="Open Sans" panose="020F0502020204030204" pitchFamily="34" charset="0"/>
-              </a:rPr>
-              <a:t>2 </a:t>
-            </a:r>
-            <a:r>
-              <a:rPr lang="ko-KR" altLang="en-US" sz="1800" b="0" i="0" dirty="0">
-                <a:effectLst/>
-                <a:latin typeface="Open Sans" panose="020F0502020204030204" pitchFamily="34" charset="0"/>
-              </a:rPr>
-              <a:t>중 어느 하나라도 벽인 부분은 전체 지도에서도 벽이다</a:t>
-            </a:r>
-            <a:r>
-              <a:rPr lang="en-US" altLang="ko-KR" sz="1800" b="0" i="0" dirty="0">
-                <a:effectLst/>
-                <a:latin typeface="Open Sans" panose="020F0502020204030204" pitchFamily="34" charset="0"/>
-              </a:rPr>
-              <a:t>. </a:t>
-            </a:r>
-            <a:r>
-              <a:rPr lang="ko-KR" altLang="en-US" sz="1800" b="0" i="0" dirty="0">
-                <a:effectLst/>
-                <a:latin typeface="Open Sans" panose="020F0502020204030204" pitchFamily="34" charset="0"/>
-              </a:rPr>
-              <a:t>지도 </a:t>
-            </a:r>
-            <a:r>
-              <a:rPr lang="en-US" altLang="ko-KR" sz="1800" b="0" i="0" dirty="0">
-                <a:effectLst/>
-                <a:latin typeface="Open Sans" panose="020F0502020204030204" pitchFamily="34" charset="0"/>
-              </a:rPr>
-              <a:t>1</a:t>
-            </a:r>
-            <a:r>
-              <a:rPr lang="ko-KR" altLang="en-US" sz="1800" b="0" i="0" dirty="0">
-                <a:effectLst/>
-                <a:latin typeface="Open Sans" panose="020F0502020204030204" pitchFamily="34" charset="0"/>
-              </a:rPr>
-              <a:t>과 지도 </a:t>
-            </a:r>
-            <a:r>
-              <a:rPr lang="en-US" altLang="ko-KR" sz="1800" b="0" i="0" dirty="0">
-                <a:effectLst/>
-                <a:latin typeface="Open Sans" panose="020F0502020204030204" pitchFamily="34" charset="0"/>
-              </a:rPr>
-              <a:t>2</a:t>
-            </a:r>
-            <a:r>
-              <a:rPr lang="ko-KR" altLang="en-US" sz="1800" b="0" i="0" dirty="0">
-                <a:effectLst/>
-                <a:latin typeface="Open Sans" panose="020F0502020204030204" pitchFamily="34" charset="0"/>
-              </a:rPr>
-              <a:t>에서 모두 공백인 부분은 전체 지도에서도 공백이다</a:t>
-            </a:r>
-            <a:r>
-              <a:rPr lang="en-US" altLang="ko-KR" sz="1800" b="0" i="0" dirty="0">
-                <a:effectLst/>
-                <a:latin typeface="Open Sans" panose="020F0502020204030204" pitchFamily="34" charset="0"/>
-              </a:rPr>
-              <a:t>.</a:t>
-            </a:r>
-          </a:p>
-          <a:p>
-            <a:pPr algn="just"/>
-            <a:r>
-              <a:rPr lang="en-US" altLang="ko-KR" sz="1800" b="0" i="0" dirty="0">
-                <a:effectLst/>
-                <a:latin typeface="Open Sans" panose="020F0502020204030204" pitchFamily="34" charset="0"/>
-              </a:rPr>
-              <a:t>"</a:t>
-            </a:r>
-            <a:r>
-              <a:rPr lang="ko-KR" altLang="en-US" sz="1800" b="0" i="0" dirty="0">
-                <a:effectLst/>
-                <a:latin typeface="Open Sans" panose="020F0502020204030204" pitchFamily="34" charset="0"/>
-              </a:rPr>
-              <a:t>지도 </a:t>
-            </a:r>
-            <a:r>
-              <a:rPr lang="en-US" altLang="ko-KR" sz="1800" b="0" i="0" dirty="0">
-                <a:effectLst/>
-                <a:latin typeface="Open Sans" panose="020F0502020204030204" pitchFamily="34" charset="0"/>
-              </a:rPr>
-              <a:t>1"</a:t>
-            </a:r>
-            <a:r>
-              <a:rPr lang="ko-KR" altLang="en-US" sz="1800" b="0" i="0" dirty="0">
-                <a:effectLst/>
-                <a:latin typeface="Open Sans" panose="020F0502020204030204" pitchFamily="34" charset="0"/>
-              </a:rPr>
-              <a:t>과 </a:t>
-            </a:r>
-            <a:r>
-              <a:rPr lang="en-US" altLang="ko-KR" sz="1800" b="0" i="0" dirty="0">
-                <a:effectLst/>
-                <a:latin typeface="Open Sans" panose="020F0502020204030204" pitchFamily="34" charset="0"/>
-              </a:rPr>
-              <a:t>"</a:t>
-            </a:r>
-            <a:r>
-              <a:rPr lang="ko-KR" altLang="en-US" sz="1800" b="0" i="0" dirty="0">
-                <a:effectLst/>
-                <a:latin typeface="Open Sans" panose="020F0502020204030204" pitchFamily="34" charset="0"/>
-              </a:rPr>
-              <a:t>지도 </a:t>
-            </a:r>
-            <a:r>
-              <a:rPr lang="en-US" altLang="ko-KR" sz="1800" b="0" i="0" dirty="0">
-                <a:effectLst/>
-                <a:latin typeface="Open Sans" panose="020F0502020204030204" pitchFamily="34" charset="0"/>
-              </a:rPr>
-              <a:t>2"</a:t>
-            </a:r>
-            <a:r>
-              <a:rPr lang="ko-KR" altLang="en-US" sz="1800" b="0" i="0" dirty="0">
-                <a:effectLst/>
-                <a:latin typeface="Open Sans" panose="020F0502020204030204" pitchFamily="34" charset="0"/>
-              </a:rPr>
-              <a:t>는 각각 정수 배열로 암호화되어 있다</a:t>
-            </a:r>
-            <a:r>
-              <a:rPr lang="en-US" altLang="ko-KR" sz="1800" b="0" i="0" dirty="0">
-                <a:effectLst/>
-                <a:latin typeface="Open Sans" panose="020F0502020204030204" pitchFamily="34" charset="0"/>
-              </a:rPr>
-              <a:t>.</a:t>
-            </a:r>
-          </a:p>
-          <a:p>
-            <a:pPr algn="just"/>
-            <a:r>
-              <a:rPr lang="ko-KR" altLang="en-US" sz="1800" b="0" i="0" dirty="0">
-                <a:effectLst/>
-                <a:latin typeface="Open Sans" panose="020F0502020204030204" pitchFamily="34" charset="0"/>
-              </a:rPr>
-              <a:t>암호화된 배열은 지도의 각 가로줄에서 벽 부분을 </a:t>
-            </a:r>
-            <a:r>
-              <a:rPr lang="en-US" altLang="ko-KR" sz="1800" b="0" i="0" dirty="0">
-                <a:effectLst/>
-                <a:latin typeface="Open Sans" panose="020F0502020204030204" pitchFamily="34" charset="0"/>
-              </a:rPr>
-              <a:t>1, </a:t>
-            </a:r>
-            <a:r>
-              <a:rPr lang="ko-KR" altLang="en-US" sz="1800" b="0" i="0" dirty="0">
-                <a:effectLst/>
-                <a:latin typeface="Open Sans" panose="020F0502020204030204" pitchFamily="34" charset="0"/>
-              </a:rPr>
-              <a:t>공백 부분을 </a:t>
-            </a:r>
-            <a:r>
-              <a:rPr lang="en-US" altLang="ko-KR" sz="1800" b="0" i="0" dirty="0">
-                <a:effectLst/>
-                <a:latin typeface="Open Sans" panose="020F0502020204030204" pitchFamily="34" charset="0"/>
-              </a:rPr>
-              <a:t>0</a:t>
-            </a:r>
-            <a:r>
-              <a:rPr lang="ko-KR" altLang="en-US" sz="1800" b="0" i="0" dirty="0">
-                <a:effectLst/>
-                <a:latin typeface="Open Sans" panose="020F0502020204030204" pitchFamily="34" charset="0"/>
-              </a:rPr>
-              <a:t>으로 </a:t>
-            </a:r>
-            <a:r>
-              <a:rPr lang="ko-KR" altLang="en-US" sz="1800" b="0" i="0" dirty="0" err="1">
-                <a:effectLst/>
-                <a:latin typeface="Open Sans" panose="020F0502020204030204" pitchFamily="34" charset="0"/>
-              </a:rPr>
-              <a:t>부호화했을</a:t>
-            </a:r>
-            <a:r>
-              <a:rPr lang="ko-KR" altLang="en-US" sz="1800" b="0" i="0" dirty="0">
-                <a:effectLst/>
-                <a:latin typeface="Open Sans" panose="020F0502020204030204" pitchFamily="34" charset="0"/>
-              </a:rPr>
-              <a:t> 때 얻어지는 이진수에 해당하는 값의 배열이다</a:t>
-            </a:r>
-            <a:r>
-              <a:rPr lang="en-US" altLang="ko-KR" sz="1800" b="0" i="0" dirty="0">
-                <a:effectLst/>
-                <a:latin typeface="Open Sans" panose="020F0502020204030204" pitchFamily="34" charset="0"/>
-              </a:rPr>
-              <a:t>.</a:t>
-            </a:r>
-          </a:p>
-          <a:p>
-            <a:pPr algn="just"/>
-            <a:r>
-              <a:rPr lang="ko-KR" altLang="en-US" sz="1800" b="0" i="0" dirty="0">
-                <a:effectLst/>
-                <a:latin typeface="Open Sans" panose="020F0502020204030204" pitchFamily="34" charset="0"/>
-              </a:rPr>
-              <a:t>원래의 비밀지도를 해독하여 </a:t>
-            </a:r>
-            <a:r>
-              <a:rPr lang="en-US" altLang="ko-KR" sz="1800" b="0" i="0" dirty="0">
-                <a:effectLst/>
-                <a:latin typeface="Open Sans" panose="020F0502020204030204" pitchFamily="34" charset="0"/>
-              </a:rPr>
-              <a:t>'#', </a:t>
-            </a:r>
-            <a:r>
-              <a:rPr lang="ko-KR" altLang="en-US" sz="1800" b="0" i="0" dirty="0">
-                <a:effectLst/>
-                <a:latin typeface="Open Sans" panose="020F0502020204030204" pitchFamily="34" charset="0"/>
-              </a:rPr>
-              <a:t>공백으로 구성된 문자열 배열로 출력하라</a:t>
-            </a:r>
-            <a:r>
-              <a:rPr lang="en-US" altLang="ko-KR" sz="1800" b="0" i="0" dirty="0">
-                <a:effectLst/>
-                <a:latin typeface="Open Sans" panose="020F0502020204030204" pitchFamily="34" charset="0"/>
-              </a:rPr>
-              <a:t>. </a:t>
-            </a:r>
-          </a:p>
-          <a:p>
-            <a:pPr algn="just"/>
-            <a:endParaRPr lang="en-US" altLang="ko-KR" sz="1800" b="0" i="0" dirty="0">
-              <a:effectLst/>
-              <a:latin typeface="Open Sans" panose="020F0502020204030204" pitchFamily="34" charset="0"/>
-            </a:endParaRPr>
-          </a:p>
-        </p:txBody>
-      </p:sp>
-      <p:pic>
-        <p:nvPicPr>
-          <p:cNvPr id="11" name="그림 10">
-            <a:extLst>
-              <a:ext uri="{FF2B5EF4-FFF2-40B4-BE49-F238E27FC236}">
-                <a16:creationId xmlns:a16="http://schemas.microsoft.com/office/drawing/2014/main" id="{45F1FA4E-87F5-E4BA-223F-3803A514AF26}"/>
-              </a:ext>
-            </a:extLst>
-          </p:cNvPr>
-          <p:cNvPicPr>
-            <a:picLocks noChangeAspect="1"/>
-          </p:cNvPicPr>
-          <p:nvPr/>
-        </p:nvPicPr>
-        <p:blipFill>
-          <a:blip r:embed="rId3"/>
-          <a:stretch>
-            <a:fillRect/>
-          </a:stretch>
-        </p:blipFill>
-        <p:spPr>
-          <a:xfrm>
-            <a:off x="1833004" y="4111890"/>
-            <a:ext cx="5477991" cy="2451069"/>
-          </a:xfrm>
-          <a:prstGeom prst="rect">
-            <a:avLst/>
-          </a:prstGeom>
-        </p:spPr>
-      </p:pic>
-    </p:spTree>
-    <p:extLst>
-      <p:ext uri="{BB962C8B-B14F-4D97-AF65-F5344CB8AC3E}">
-        <p14:creationId xmlns:p14="http://schemas.microsoft.com/office/powerpoint/2010/main" val="2988214561"/>
-      </p:ext>
-    </p:extLst>
-  </p:cSld>
-  <p:clrMapOvr>
-    <a:masterClrMapping/>
-  </p:clrMapOvr>
-</p:sld>
-</file>
-
-<file path=ppt/slides/slide9.xml><?xml version="1.0" encoding="utf-8"?>
-<p:sld xmlns:a="http://schemas.openxmlformats.org/drawingml/2006/main" xmlns:r="http://schemas.openxmlformats.org/officeDocument/2006/relationships" xmlns:p="http://schemas.openxmlformats.org/presentationml/2006/main">
-  <p:cSld>
-    <p:spTree>
-      <p:nvGrpSpPr>
-        <p:cNvPr id="1" name="">
-          <a:extLst>
-            <a:ext uri="{FF2B5EF4-FFF2-40B4-BE49-F238E27FC236}">
-              <a16:creationId xmlns:a16="http://schemas.microsoft.com/office/drawing/2014/main" id="{E8F93FCF-3F08-E0F4-5108-31984F44175D}"/>
-            </a:ext>
-          </a:extLst>
-        </p:cNvPr>
-        <p:cNvGrpSpPr/>
-        <p:nvPr/>
-      </p:nvGrpSpPr>
-      <p:grpSpPr>
-        <a:xfrm>
-          <a:off x="0" y="0"/>
-          <a:ext cx="0" cy="0"/>
-          <a:chOff x="0" y="0"/>
-          <a:chExt cx="0" cy="0"/>
-        </a:xfrm>
-      </p:grpSpPr>
-      <p:sp>
-        <p:nvSpPr>
-          <p:cNvPr id="2" name="제목 1">
-            <a:extLst>
-              <a:ext uri="{FF2B5EF4-FFF2-40B4-BE49-F238E27FC236}">
-                <a16:creationId xmlns:a16="http://schemas.microsoft.com/office/drawing/2014/main" id="{E7818B47-20D8-CDD6-F074-07282F3BE498}"/>
-              </a:ext>
-            </a:extLst>
-          </p:cNvPr>
-          <p:cNvSpPr>
-            <a:spLocks noGrp="1"/>
-          </p:cNvSpPr>
-          <p:nvPr>
-            <p:ph type="title"/>
-          </p:nvPr>
-        </p:nvSpPr>
-        <p:spPr/>
-        <p:txBody>
-          <a:bodyPr/>
-          <a:lstStyle/>
-          <a:p>
-            <a:r>
-              <a:rPr lang="en-US" altLang="ko-KR" sz="2800" dirty="0"/>
-              <a:t>4. </a:t>
-            </a:r>
-            <a:r>
-              <a:rPr lang="ko-KR" altLang="en-US" sz="2800" dirty="0"/>
-              <a:t>비밀지도</a:t>
-            </a:r>
-            <a:r>
-              <a:rPr lang="en-US" altLang="ko-KR" sz="2800" dirty="0"/>
-              <a:t>(Programmers, </a:t>
-            </a:r>
-            <a:r>
-              <a:rPr lang="ko-KR" altLang="en-US" sz="2800" dirty="0"/>
-              <a:t>구현</a:t>
-            </a:r>
-            <a:r>
-              <a:rPr lang="en-US" altLang="ko-KR" sz="2800" dirty="0"/>
-              <a:t>) </a:t>
-            </a:r>
-            <a:br>
-              <a:rPr lang="en-US" altLang="ko-KR" sz="2800" dirty="0"/>
-            </a:br>
-            <a:r>
-              <a:rPr lang="en-US" altLang="ko-KR" sz="2000" dirty="0"/>
-              <a:t>https://school.programmers.co.kr/learn/courses/30/lessons/17681</a:t>
-            </a:r>
-            <a:endParaRPr lang="ko-KR" altLang="en-US" sz="2000" dirty="0"/>
-          </a:p>
-        </p:txBody>
-      </p:sp>
-      <p:sp>
-        <p:nvSpPr>
-          <p:cNvPr id="5" name="슬라이드 번호 개체 틀 4">
-            <a:extLst>
-              <a:ext uri="{FF2B5EF4-FFF2-40B4-BE49-F238E27FC236}">
-                <a16:creationId xmlns:a16="http://schemas.microsoft.com/office/drawing/2014/main" id="{CE124102-0D47-DB9A-6FB9-A656E4472396}"/>
-              </a:ext>
-            </a:extLst>
-          </p:cNvPr>
-          <p:cNvSpPr>
-            <a:spLocks noGrp="1"/>
-          </p:cNvSpPr>
-          <p:nvPr>
-            <p:ph type="sldNum" sz="quarter" idx="12"/>
-          </p:nvPr>
-        </p:nvSpPr>
-        <p:spPr/>
-        <p:txBody>
-          <a:bodyPr/>
-          <a:lstStyle/>
-          <a:p>
-            <a:pPr>
-              <a:defRPr/>
-            </a:pPr>
-            <a:fld id="{A268DA64-E15D-4814-A1DA-86D92D550423}" type="slidenum">
-              <a:rPr lang="ko-KR" altLang="en-US" smtClean="0"/>
-              <a:pPr>
-                <a:defRPr/>
-              </a:pPr>
-              <a:t>9</a:t>
-            </a:fld>
-            <a:endParaRPr lang="ko-KR" altLang="en-US"/>
-          </a:p>
-        </p:txBody>
-      </p:sp>
-      <p:pic>
-        <p:nvPicPr>
-          <p:cNvPr id="8" name="그림 7">
-            <a:extLst>
-              <a:ext uri="{FF2B5EF4-FFF2-40B4-BE49-F238E27FC236}">
-                <a16:creationId xmlns:a16="http://schemas.microsoft.com/office/drawing/2014/main" id="{8EF56E33-8E2E-3D60-30E3-B02A001EC9C2}"/>
-              </a:ext>
-            </a:extLst>
-          </p:cNvPr>
-          <p:cNvPicPr>
-            <a:picLocks noChangeAspect="1"/>
-          </p:cNvPicPr>
-          <p:nvPr/>
-        </p:nvPicPr>
-        <p:blipFill>
-          <a:blip r:embed="rId3"/>
-          <a:stretch>
-            <a:fillRect/>
-          </a:stretch>
-        </p:blipFill>
-        <p:spPr>
-          <a:xfrm>
-            <a:off x="653087" y="1484784"/>
-            <a:ext cx="4350961" cy="4747146"/>
-          </a:xfrm>
-          <a:prstGeom prst="rect">
-            <a:avLst/>
-          </a:prstGeom>
-        </p:spPr>
-      </p:pic>
-      <p:pic>
-        <p:nvPicPr>
-          <p:cNvPr id="10" name="그림 9">
-            <a:extLst>
-              <a:ext uri="{FF2B5EF4-FFF2-40B4-BE49-F238E27FC236}">
-                <a16:creationId xmlns:a16="http://schemas.microsoft.com/office/drawing/2014/main" id="{103FED87-D4EA-BD72-0524-A1D507CA3EFF}"/>
-              </a:ext>
-            </a:extLst>
-          </p:cNvPr>
-          <p:cNvPicPr>
-            <a:picLocks noChangeAspect="1"/>
-          </p:cNvPicPr>
-          <p:nvPr/>
-        </p:nvPicPr>
-        <p:blipFill>
-          <a:blip r:embed="rId4"/>
-          <a:stretch>
-            <a:fillRect/>
-          </a:stretch>
-        </p:blipFill>
-        <p:spPr>
-          <a:xfrm>
-            <a:off x="6097592" y="2708920"/>
-            <a:ext cx="2236637" cy="2257094"/>
-          </a:xfrm>
-          <a:prstGeom prst="rect">
-            <a:avLst/>
-          </a:prstGeom>
-        </p:spPr>
-      </p:pic>
-      <p:sp>
-        <p:nvSpPr>
-          <p:cNvPr id="12" name="화살표: 오른쪽 11">
-            <a:extLst>
-              <a:ext uri="{FF2B5EF4-FFF2-40B4-BE49-F238E27FC236}">
-                <a16:creationId xmlns:a16="http://schemas.microsoft.com/office/drawing/2014/main" id="{6D9EB52F-1E06-CFB4-EBC1-C044FD36702A}"/>
-              </a:ext>
-            </a:extLst>
-          </p:cNvPr>
-          <p:cNvSpPr/>
-          <p:nvPr/>
-        </p:nvSpPr>
-        <p:spPr>
-          <a:xfrm>
-            <a:off x="5364088" y="3573016"/>
-            <a:ext cx="504056" cy="576064"/>
-          </a:xfrm>
-          <a:prstGeom prst="rightArrow">
-            <a:avLst/>
-          </a:prstGeom>
-        </p:spPr>
-        <p:style>
-          <a:lnRef idx="2">
-            <a:schemeClr val="accent1">
-              <a:shade val="15000"/>
-            </a:schemeClr>
-          </a:lnRef>
-          <a:fillRef idx="1">
-            <a:schemeClr val="accent1"/>
-          </a:fillRef>
-          <a:effectRef idx="0">
-            <a:schemeClr val="accent1"/>
-          </a:effectRef>
-          <a:fontRef idx="minor">
-            <a:schemeClr val="lt1"/>
-          </a:fontRef>
-        </p:style>
-        <p:txBody>
-          <a:bodyPr rtlCol="0" anchor="ctr"/>
-          <a:lstStyle/>
-          <a:p>
-            <a:pPr algn="ctr"/>
-            <a:endParaRPr lang="ko-KR" altLang="en-US"/>
-          </a:p>
-        </p:txBody>
-      </p:sp>
-    </p:spTree>
-    <p:extLst>
-      <p:ext uri="{BB962C8B-B14F-4D97-AF65-F5344CB8AC3E}">
-        <p14:creationId xmlns:p14="http://schemas.microsoft.com/office/powerpoint/2010/main" val="2323102850"/>
       </p:ext>
     </p:extLst>
   </p:cSld>
